--- a/protected-downloads/praesentation/TL06.pptx
+++ b/protected-downloads/praesentation/TL06.pptx
@@ -4859,7 +4859,7 @@
                 </a:solidFill>
                 <a:latin typeface="Arial"/>
               </a:rPr>
-              <a:t>v0.2</a:t>
+              <a:t>v1.0</a:t>
             </a:r>
           </a:p>
         </p:txBody>

--- a/protected-downloads/praesentation/TL06.pptx
+++ b/protected-downloads/praesentation/TL06.pptx
@@ -594,32 +594,17 @@
           <a:lstStyle/>
           <a:p>
             <a:r>
-              <a:t>Instruktion Sprachcheck (185–202 Min.): 'Lesen Sie Ihren Einstiegssatz vor – Rückmeldung aus Berater-Perspektive: Fühle ich mich zur Klärung eingeladen oder bereits verurteilt?'</a:t>
-            </a:r>
-          </a:p>
-          <a:p>
-            <a:r>
-              <a:t>Kein Rollenspiel – es geht um den Text, nicht um eine Gesprächssimulation.</a:t>
-            </a:r>
-          </a:p>
-          <a:p>
-            <a:r>
-              <a:t>Abwehr-Variante B (Sinnzweifel) ist eine andere Gesprächssituation als A: erst Nutzen für den Berater selbst benennen, dann Vereinbarungs-Ebene.</a:t>
-            </a:r>
-          </a:p>
-          <a:p>
-            <a:r>
-              <a:t>Zwischenerinnerung nach 10 Min.: 'Ihr Einstiegssatz muss: Sachverhalt benennen (nicht beschönigen) / Klärungsabsicht signalisieren / Einladen, nicht überrumpeln.'</a:t>
-            </a:r>
-          </a:p>
-          <a:p>
-            <a:r>
-              <a:t>Stille Überarbeitung (202–205 Min.) explizit ausweisen – geht sonst unter.</a:t>
-            </a:r>
-          </a:p>
-          <a:p>
-            <a:r>
-              <a:t>Plenum-Auswertung: Zweite Version, nicht erste. Sichtbar machen, was der Sprachcheck bewirkt hat.</a:t>
+              <a:t>Selbstcheck (Sec 5) in Stille ausfüllen (ca. 3 Min.): Welche Frage ist die unbequemste?</a:t>
+            </a:r>
+          </a:p>
+          <a:p>
+            <a:r>
+              <a:t>Plenumsfrage: 'Was nehme ich heute mit – eine konkrete Handlung bis Ende dieser Woche?' 2–3 TN antworten lassen.</a:t>
+            </a:r>
+          </a:p>
+          <a:p>
+            <a:r>
+              <a:t>Transferaufgabe 3 besonders betonen: Nicht auf nach der nächsten TL-Runde verschieben.</a:t>
             </a:r>
           </a:p>
         </p:txBody>
@@ -689,86 +674,6 @@
           <a:lstStyle/>
           <a:p>
             <a:r>
-              <a:t>Selbstcheck (Sec 5) in Stille ausfüllen (ca. 3 Min.): Welche Frage ist die unbequemste?</a:t>
-            </a:r>
-          </a:p>
-          <a:p>
-            <a:r>
-              <a:t>Plenumsfrage: 'Was nehme ich heute mit – eine konkrete Handlung bis Ende dieser Woche?' 2–3 TN antworten lassen.</a:t>
-            </a:r>
-          </a:p>
-          <a:p>
-            <a:r>
-              <a:t>Transferaufgabe 3 besonders betonen: Nicht auf nach der nächsten TL-Runde verschieben.</a:t>
-            </a:r>
-          </a:p>
-        </p:txBody>
-      </p:sp>
-      <p:sp>
-        <p:nvSpPr>
-          <p:cNvPr id="4" name="Slide Number Placeholder 3"/>
-          <p:cNvSpPr>
-            <a:spLocks noGrp="1"/>
-          </p:cNvSpPr>
-          <p:nvPr>
-            <p:ph type="sldNum" idx="5" sz="quarter"/>
-          </p:nvPr>
-        </p:nvSpPr>
-        <p:spPr/>
-      </p:sp>
-    </p:spTree>
-  </p:cSld>
-  <p:clrMapOvr>
-    <a:masterClrMapping/>
-  </p:clrMapOvr>
-</p:notes>
-</file>
-
-<file path=ppt/notesSlides/notesSlide12.xml><?xml version="1.0" encoding="utf-8"?>
-<p:notes xmlns:a="http://schemas.openxmlformats.org/drawingml/2006/main" xmlns:p="http://schemas.openxmlformats.org/presentationml/2006/main" xmlns:r="http://schemas.openxmlformats.org/officeDocument/2006/relationships">
-  <p:cSld>
-    <p:spTree>
-      <p:nvGrpSpPr>
-        <p:cNvPr id="1" name=""/>
-        <p:cNvGrpSpPr/>
-        <p:nvPr/>
-      </p:nvGrpSpPr>
-      <p:grpSpPr>
-        <a:xfrm>
-          <a:off x="0" y="0"/>
-          <a:ext cx="0" cy="0"/>
-          <a:chOff x="0" y="0"/>
-          <a:chExt cx="0" cy="0"/>
-        </a:xfrm>
-      </p:grpSpPr>
-      <p:sp>
-        <p:nvSpPr>
-          <p:cNvPr id="2" name="Slide Image Placeholder 1"/>
-          <p:cNvSpPr>
-            <a:spLocks noGrp="1"/>
-          </p:cNvSpPr>
-          <p:nvPr>
-            <p:ph type="sldImg" idx="2"/>
-          </p:nvPr>
-        </p:nvSpPr>
-        <p:spPr/>
-      </p:sp>
-      <p:sp>
-        <p:nvSpPr>
-          <p:cNvPr id="3" name="Notes Placeholder 2"/>
-          <p:cNvSpPr>
-            <a:spLocks noGrp="1"/>
-          </p:cNvSpPr>
-          <p:nvPr>
-            <p:ph type="body" idx="3" sz="quarter"/>
-          </p:nvPr>
-        </p:nvSpPr>
-        <p:spPr/>
-        <p:txBody>
-          <a:bodyPr/>
-          <a:lstStyle/>
-          <a:p>
-            <a:r>
               <a:t>Greenleaf-Test vorlesen: 'Wachsen die Menschen, denen Sie führend begegnen – werden sie kompetenter, freier, eigenverantwortlicher?'</a:t>
             </a:r>
           </a:p>
@@ -849,7 +754,17 @@
           <a:lstStyle/>
           <a:p>
             <a:r>
-              <a:t>Siehe Trainerhandbuch (Sektion 3) für Moderationshinweise, Timing und erwartete Teilnehmerreaktionen.</a:t>
+              <a:t>Blitzlicht-Runde aufgreifen (Flipchart, 0–15 Min.): Welche Situation beschäftigt Sie gerade bei Feedback oder Entwicklungsgesprächen?</a:t>
+            </a:r>
+          </a:p>
+          <a:p>
+            <a:r>
+              <a:t>Explizit benennen: 'TL06 ist kein Konsequenzgespräch – das kommt in TL08. Heute geht es um den Raum davor.'</a:t>
+            </a:r>
+          </a:p>
+          <a:p>
+            <a:r>
+              <a:t>Merksatz Flipchart: Das erste Nachfassgespräch klärt – es anklagt nicht.</a:t>
             </a:r>
           </a:p>
         </p:txBody>
@@ -919,17 +834,12 @@
           <a:lstStyle/>
           <a:p>
             <a:r>
-              <a:t>Blitzlicht-Runde aufgreifen (Flipchart, 0–15 Min.): Welche Situation beschäftigt Sie gerade bei Feedback oder Entwicklungsgesprächen?</a:t>
-            </a:r>
-          </a:p>
-          <a:p>
-            <a:r>
-              <a:t>Explizit benennen: 'TL06 ist kein Konsequenzgespräch – das kommt in TL08. Heute geht es um den Raum davor.'</a:t>
-            </a:r>
-          </a:p>
-          <a:p>
-            <a:r>
-              <a:t>Merksatz Flipchart: Das erste Nachfassgespräch klärt – es anklagt nicht.</a:t>
+              <a:t>Tabelle als Direktvergleich – TN benennen lassen, welche Spalte näher an ihrem Alltag liegt.</a:t>
+            </a:r>
+          </a:p>
+          <a:p>
+            <a:r>
+              <a:t>Erst Irritation erzeugen ('rechte Spalte klingt ehrlicher'), dann kontraintuitiven Befund einleiten.</a:t>
             </a:r>
           </a:p>
         </p:txBody>
@@ -999,12 +909,17 @@
           <a:lstStyle/>
           <a:p>
             <a:r>
-              <a:t>Tabelle als Direktvergleich – TN benennen lassen, welche Spalte näher an ihrem Alltag liegt.</a:t>
-            </a:r>
-          </a:p>
-          <a:p>
-            <a:r>
-              <a:t>Erst Irritation erzeugen ('rechte Spalte klingt ehrlicher'), dann kontraintuitiven Befund einleiten.</a:t>
+              <a:t>Aktivierungsfrage: 'Welche Ebene adressiert das häufigste Feedback der letzten Wochen bei Ihnen – Aufgabe, Prozess oder Person?'</a:t>
+            </a:r>
+          </a:p>
+          <a:p>
+            <a:r>
+              <a:t>Vier Ebenen auf Flipchart festhalten (Aufgabe / Prozess / Selbstregulation / Selbst) – bleibt den gesamten Block sichtbar.</a:t>
+            </a:r>
+          </a:p>
+          <a:p>
+            <a:r>
+              <a:t>Hattie &amp; Timperley (2007): Feedback wirkt, wenn es die Lücke benennt UND den Weg zeigt.</a:t>
             </a:r>
           </a:p>
         </p:txBody>
@@ -1074,17 +989,17 @@
           <a:lstStyle/>
           <a:p>
             <a:r>
-              <a:t>Aktivierungsfrage: 'Welche Ebene adressiert das häufigste Feedback der letzten Wochen bei Ihnen – Aufgabe, Prozess oder Person?'</a:t>
-            </a:r>
-          </a:p>
-          <a:p>
-            <a:r>
-              <a:t>Vier Ebenen auf Flipchart festhalten (Aufgabe / Prozess / Selbstregulation / Selbst) – bleibt den gesamten Block sichtbar.</a:t>
-            </a:r>
-          </a:p>
-          <a:p>
-            <a:r>
-              <a:t>Hattie &amp; Timperley (2007): Feedback wirkt, wenn es die Lücke benennt UND den Weg zeigt.</a:t>
+              <a:t>Häufigste Verwechslung in der Praxis: Jahresgespräch heißt 'Entwicklungsgespräch', hat aber Beurteilungs-Struktur.</a:t>
+            </a:r>
+          </a:p>
+          <a:p>
+            <a:r>
+              <a:t>Haltungsunterschiede betonen – nicht die formalen Merkmale. Der Unterschied liegt in der Führungshaltung.</a:t>
+            </a:r>
+          </a:p>
+          <a:p>
+            <a:r>
+              <a:t>Nachfrage: 'Welches der drei Formate führen Sie am häufigsten? Welches am seltensten?'</a:t>
             </a:r>
           </a:p>
         </p:txBody>
@@ -1154,17 +1069,22 @@
           <a:lstStyle/>
           <a:p>
             <a:r>
-              <a:t>Häufigste Verwechslung in der Praxis: Jahresgespräch heißt 'Entwicklungsgespräch', hat aber Beurteilungs-Struktur.</a:t>
-            </a:r>
-          </a:p>
-          <a:p>
-            <a:r>
-              <a:t>Haltungsunterschiede betonen – nicht die formalen Merkmale. Der Unterschied liegt in der Führungshaltung.</a:t>
-            </a:r>
-          </a:p>
-          <a:p>
-            <a:r>
-              <a:t>Nachfrage: 'Welches der drei Formate führen Sie am häufigsten? Welches am seltensten?'</a:t>
+              <a:t>TN benennen lassen, welcher Schritt am schwersten fällt – fast immer Schritt 2 (Einstieg mit Entwicklungsabsicht) oder Schritt 3 (Stärken konkret, nicht allgemein).</a:t>
+            </a:r>
+          </a:p>
+          <a:p>
+            <a:r>
+              <a:t>Auf Flipchart notieren: 'Das ist der Kern von AB-1.'</a:t>
+            </a:r>
+          </a:p>
+          <a:p>
+            <a:r>
+              <a:t>Greenleaf (1977) kurz einführen: 'Werden die Menschen, denen du führend begegnest, kompetenter, freier, eigenverantwortlicher?' – Maßstab des Entwicklungsgesprächs.</a:t>
+            </a:r>
+          </a:p>
+          <a:p>
+            <a:r>
+              <a:t>Schön (1983): Gesprächsstruktur ist Gerüst, kein Skript. Wenn Berater signalisiert, dass Stärke keine Stärke für ihn ist – folgen, nicht weitermarschieren.</a:t>
             </a:r>
           </a:p>
         </p:txBody>
@@ -1234,22 +1154,17 @@
           <a:lstStyle/>
           <a:p>
             <a:r>
-              <a:t>TN benennen lassen, welcher Schritt am schwersten fällt – fast immer Schritt 2 (Einstieg mit Entwicklungsabsicht) oder Schritt 3 (Stärken konkret, nicht allgemein).</a:t>
-            </a:r>
-          </a:p>
-          <a:p>
-            <a:r>
-              <a:t>Auf Flipchart notieren: 'Das ist der Kern von AB-1.'</a:t>
-            </a:r>
-          </a:p>
-          <a:p>
-            <a:r>
-              <a:t>Greenleaf (1977) kurz einführen: 'Werden die Menschen, denen du führend begegnest, kompetenter, freier, eigenverantwortlicher?' – Maßstab des Entwicklungsgesprächs.</a:t>
-            </a:r>
-          </a:p>
-          <a:p>
-            <a:r>
-              <a:t>Schön (1983): Gesprächsstruktur ist Gerüst, kein Skript. Wenn Berater signalisiert, dass Stärke keine Stärke für ihn ist – folgen, nicht weitermarschieren.</a:t>
+              <a:t>Spontanfrage an TN: 'Was ist Ihre erste Reaktion, wenn eine vereinbarte Maßnahme nicht umgesetzt wurde – Ignorieren, Eskalieren oder Nachfassen?' Antworten zeigen, wo die individuelle Neigung im Raum liegt.</a:t>
+            </a:r>
+          </a:p>
+          <a:p>
+            <a:r>
+              <a:t>Formulierung für den häufigsten Reflex: 'Das Nachfassgespräch ist keine Schwäche. Es ist die Entscheidung, Verbindlichkeit aufrechtzuerhalten und Klärung vor Strafe zu stellen.'</a:t>
+            </a:r>
+          </a:p>
+          <a:p>
+            <a:r>
+              <a:t>Faustformel einführen: einmal klären und neu vereinbaren – beim zweiten Mal ohne Grund ist das Signal für TL08 gegeben.</a:t>
             </a:r>
           </a:p>
         </p:txBody>
@@ -1319,17 +1234,22 @@
           <a:lstStyle/>
           <a:p>
             <a:r>
-              <a:t>Spontanfrage an TN: 'Was ist Ihre erste Reaktion, wenn eine vereinbarte Maßnahme nicht umgesetzt wurde – Ignorieren, Eskalieren oder Nachfassen?' Antworten zeigen, wo die individuelle Neigung im Raum liegt.</a:t>
-            </a:r>
-          </a:p>
-          <a:p>
-            <a:r>
-              <a:t>Formulierung für den häufigsten Reflex: 'Das Nachfassgespräch ist keine Schwäche. Es ist die Entscheidung, Verbindlichkeit aufrechtzuerhalten und Klärung vor Strafe zu stellen.'</a:t>
-            </a:r>
-          </a:p>
-          <a:p>
-            <a:r>
-              <a:t>Faustformel einführen: einmal klären und neu vereinbaren – beim zweiten Mal ohne Grund ist das Signal für TL08 gegeben.</a:t>
+              <a:t>Zwischenerinnerung nach 12 Min.: 'Prüfen Sie, ob Ihr SBI ein Charaktermerkmal enthält – wenn ja, stoppen und zurück auf die Verhaltensebene.'</a:t>
+            </a:r>
+          </a:p>
+          <a:p>
+            <a:r>
+              <a:t>Kollegiale Fallberatung (130–155 Min.) in 3–4er-Gruppen nach Sec-3-Ablauf (6 Schritte): Fall vorstellen → Schlüsselfrage → Perspektivwechsel → Impulse → Klärung → nächster Schritt.</a:t>
+            </a:r>
+          </a:p>
+          <a:p>
+            <a:r>
+              <a:t>Falls niemand eigenen Fall einbringt: Markus-Szenario als Hauptfall planen.</a:t>
+            </a:r>
+          </a:p>
+          <a:p>
+            <a:r>
+              <a:t>Kein Rollenspiel – Gespräch bleibt auf Vorbereitungsebene.</a:t>
             </a:r>
           </a:p>
         </p:txBody>
@@ -1399,22 +1319,32 @@
           <a:lstStyle/>
           <a:p>
             <a:r>
-              <a:t>Zwischenerinnerung nach 12 Min.: 'Prüfen Sie, ob Ihr SBI ein Charaktermerkmal enthält – wenn ja, stoppen und zurück auf die Verhaltensebene.'</a:t>
-            </a:r>
-          </a:p>
-          <a:p>
-            <a:r>
-              <a:t>Kollegiale Fallberatung (130–155 Min.) in 3–4er-Gruppen nach Sec-3-Ablauf (6 Schritte): Fall vorstellen → Schlüsselfrage → Perspektivwechsel → Impulse → Klärung → nächster Schritt.</a:t>
-            </a:r>
-          </a:p>
-          <a:p>
-            <a:r>
-              <a:t>Falls niemand eigenen Fall einbringt: Markus-Szenario als Hauptfall planen.</a:t>
-            </a:r>
-          </a:p>
-          <a:p>
-            <a:r>
-              <a:t>Kein Rollenspiel – Gespräch bleibt auf Vorbereitungsebene.</a:t>
+              <a:t>Instruktion Sprachcheck (185–202 Min.): 'Lesen Sie Ihren Einstiegssatz vor – Rückmeldung aus Berater-Perspektive: Fühle ich mich zur Klärung eingeladen oder bereits verurteilt?'</a:t>
+            </a:r>
+          </a:p>
+          <a:p>
+            <a:r>
+              <a:t>Kein Rollenspiel – es geht um den Text, nicht um eine Gesprächssimulation.</a:t>
+            </a:r>
+          </a:p>
+          <a:p>
+            <a:r>
+              <a:t>Abwehr-Variante B (Sinnzweifel) ist eine andere Gesprächssituation als A: erst Nutzen für den Berater selbst benennen, dann Vereinbarungs-Ebene.</a:t>
+            </a:r>
+          </a:p>
+          <a:p>
+            <a:r>
+              <a:t>Zwischenerinnerung nach 10 Min.: 'Ihr Einstiegssatz muss: Sachverhalt benennen (nicht beschönigen) / Klärungsabsicht signalisieren / Einladen, nicht überrumpeln.'</a:t>
+            </a:r>
+          </a:p>
+          <a:p>
+            <a:r>
+              <a:t>Stille Überarbeitung (202–205 Min.) explizit ausweisen – geht sonst unter.</a:t>
+            </a:r>
+          </a:p>
+          <a:p>
+            <a:r>
+              <a:t>Plenum-Auswertung: Zweite Version, nicht erste. Sichtbar machen, was der Sprachcheck bewirkt hat.</a:t>
             </a:r>
           </a:p>
         </p:txBody>
@@ -11785,7 +11715,7 @@
             <a:avLst/>
           </a:prstGeom>
           <a:solidFill>
-            <a:srgbClr val="EDEDF3"/>
+            <a:srgbClr val="1F2C56"/>
           </a:solidFill>
           <a:ln>
             <a:noFill/>
@@ -11821,129 +11751,8 @@
         </p:nvSpPr>
         <p:spPr>
           <a:xfrm>
-            <a:off x="0" y="0"/>
-            <a:ext cx="12188952" cy="50292"/>
-          </a:xfrm>
-          <a:prstGeom prst="rect">
-            <a:avLst/>
-          </a:prstGeom>
-          <a:solidFill>
-            <a:srgbClr val="1F2C56"/>
-          </a:solidFill>
-          <a:ln>
-            <a:noFill/>
-          </a:ln>
-        </p:spPr>
-        <p:style>
-          <a:lnRef idx="1">
-            <a:schemeClr val="accent1"/>
-          </a:lnRef>
-          <a:fillRef idx="3">
-            <a:schemeClr val="accent1"/>
-          </a:fillRef>
-          <a:effectRef idx="2">
-            <a:schemeClr val="accent1"/>
-          </a:effectRef>
-          <a:fontRef idx="minor">
-            <a:schemeClr val="lt1"/>
-          </a:fontRef>
-        </p:style>
-        <p:txBody>
-          <a:bodyPr rtlCol="0" anchor="ctr"/>
-          <a:lstStyle/>
-          <a:p>
-            <a:pPr algn="ctr"/>
-          </a:p>
-        </p:txBody>
-      </p:sp>
-      <p:sp>
-        <p:nvSpPr>
-          <p:cNvPr id="4" name="TextBox 3"/>
-          <p:cNvSpPr txBox="1"/>
-          <p:nvPr/>
-        </p:nvSpPr>
-        <p:spPr>
-          <a:xfrm>
-            <a:off x="685800" y="109728"/>
-            <a:ext cx="10817352" cy="228600"/>
-          </a:xfrm>
-          <a:prstGeom prst="rect">
-            <a:avLst/>
-          </a:prstGeom>
-          <a:noFill/>
-        </p:spPr>
-        <p:txBody>
-          <a:bodyPr wrap="none">
-            <a:spAutoFit/>
-          </a:bodyPr>
-          <a:lstStyle/>
-          <a:p>
-            <a:pPr algn="l"/>
-            <a:r>
-              <a:rPr sz="750">
-                <a:solidFill>
-                  <a:srgbClr val="78808C"/>
-                </a:solidFill>
-                <a:latin typeface="Consolas"/>
-              </a:rPr>
-              <a:t>TL06  ·  INHALT</a:t>
-            </a:r>
-          </a:p>
-        </p:txBody>
-      </p:sp>
-      <p:sp>
-        <p:nvSpPr>
-          <p:cNvPr id="5" name="Rectangle 4"/>
-          <p:cNvSpPr/>
-          <p:nvPr/>
-        </p:nvSpPr>
-        <p:spPr>
-          <a:xfrm>
-            <a:off x="0" y="1234440"/>
-            <a:ext cx="12188952" cy="12700"/>
-          </a:xfrm>
-          <a:prstGeom prst="rect">
-            <a:avLst/>
-          </a:prstGeom>
-          <a:solidFill>
-            <a:srgbClr val="D8DFE4"/>
-          </a:solidFill>
-          <a:ln>
-            <a:noFill/>
-          </a:ln>
-        </p:spPr>
-        <p:style>
-          <a:lnRef idx="1">
-            <a:schemeClr val="accent1"/>
-          </a:lnRef>
-          <a:fillRef idx="3">
-            <a:schemeClr val="accent1"/>
-          </a:fillRef>
-          <a:effectRef idx="2">
-            <a:schemeClr val="accent1"/>
-          </a:effectRef>
-          <a:fontRef idx="minor">
-            <a:schemeClr val="lt1"/>
-          </a:fontRef>
-        </p:style>
-        <p:txBody>
-          <a:bodyPr rtlCol="0" anchor="ctr"/>
-          <a:lstStyle/>
-          <a:p>
-            <a:pPr algn="ctr"/>
-          </a:p>
-        </p:txBody>
-      </p:sp>
-      <p:sp>
-        <p:nvSpPr>
-          <p:cNvPr id="6" name="Rectangle 5"/>
-          <p:cNvSpPr/>
-          <p:nvPr/>
-        </p:nvSpPr>
-        <p:spPr>
-          <a:xfrm>
-            <a:off x="685800" y="502920"/>
-            <a:ext cx="36576" cy="658368"/>
+            <a:off x="685800" y="2788920"/>
+            <a:ext cx="548640" cy="38100"/>
           </a:xfrm>
           <a:prstGeom prst="rect">
             <a:avLst/>
@@ -11979,14 +11788,14 @@
       </p:sp>
       <p:sp>
         <p:nvSpPr>
-          <p:cNvPr id="7" name="TextBox 6"/>
+          <p:cNvPr id="4" name="TextBox 3"/>
           <p:cNvSpPr txBox="1"/>
           <p:nvPr/>
         </p:nvSpPr>
         <p:spPr>
           <a:xfrm>
-            <a:off x="813816" y="502920"/>
-            <a:ext cx="10634472" cy="685800"/>
+            <a:off x="685800" y="3017520"/>
+            <a:ext cx="10817352" cy="1463040"/>
           </a:xfrm>
           <a:prstGeom prst="rect">
             <a:avLst/>
@@ -12001,9 +11810,9 @@
           <a:p>
             <a:pPr algn="l"/>
             <a:r>
-              <a:rPr sz="2400" b="1" i="0">
-                <a:solidFill>
-                  <a:srgbClr val="1F2C56"/>
+              <a:rPr sz="4000" b="1" i="0">
+                <a:solidFill>
+                  <a:srgbClr val="FFFFFF"/>
                 </a:solidFill>
                 <a:latin typeface="Arial"/>
               </a:rPr>
@@ -12014,57 +11823,49 @@
       </p:sp>
       <p:sp>
         <p:nvSpPr>
-          <p:cNvPr id="8" name="Rectangle 7"/>
-          <p:cNvSpPr/>
-          <p:nvPr/>
-        </p:nvSpPr>
-        <p:spPr>
-          <a:xfrm>
-            <a:off x="0" y="6510528"/>
-            <a:ext cx="12188952" cy="347472"/>
-          </a:xfrm>
-          <a:prstGeom prst="rect">
-            <a:avLst/>
-          </a:prstGeom>
-          <a:solidFill>
-            <a:srgbClr val="0A1937"/>
-          </a:solidFill>
-          <a:ln>
-            <a:noFill/>
-          </a:ln>
-        </p:spPr>
-        <p:style>
-          <a:lnRef idx="1">
-            <a:schemeClr val="accent1"/>
-          </a:lnRef>
-          <a:fillRef idx="3">
-            <a:schemeClr val="accent1"/>
-          </a:fillRef>
-          <a:effectRef idx="2">
-            <a:schemeClr val="accent1"/>
-          </a:effectRef>
-          <a:fontRef idx="minor">
-            <a:schemeClr val="lt1"/>
-          </a:fontRef>
-        </p:style>
-        <p:txBody>
-          <a:bodyPr rtlCol="0" anchor="ctr"/>
-          <a:lstStyle/>
-          <a:p>
-            <a:pPr algn="ctr"/>
-          </a:p>
-        </p:txBody>
-      </p:sp>
-      <p:sp>
-        <p:nvSpPr>
-          <p:cNvPr id="9" name="TextBox 8"/>
+          <p:cNvPr id="5" name="TextBox 4"/>
           <p:cNvSpPr txBox="1"/>
           <p:nvPr/>
         </p:nvSpPr>
         <p:spPr>
           <a:xfrm>
-            <a:off x="685800" y="6583680"/>
-            <a:ext cx="6490411" cy="256032"/>
+            <a:off x="685800" y="4480560"/>
+            <a:ext cx="8653881" cy="1280160"/>
+          </a:xfrm>
+          <a:prstGeom prst="rect">
+            <a:avLst/>
+          </a:prstGeom>
+          <a:noFill/>
+        </p:spPr>
+        <p:txBody>
+          <a:bodyPr wrap="square">
+            <a:spAutoFit/>
+          </a:bodyPr>
+          <a:lstStyle/>
+          <a:p>
+            <a:pPr algn="l"/>
+            <a:r>
+              <a:rPr sz="1600" b="0" i="0">
+                <a:solidFill>
+                  <a:srgbClr val="C8D2E6"/>
+                </a:solidFill>
+                <a:latin typeface="Arial"/>
+              </a:rPr>
+              <a:t>Die Vereinbarung steht – und dann?</a:t>
+            </a:r>
+          </a:p>
+        </p:txBody>
+      </p:sp>
+      <p:sp>
+        <p:nvSpPr>
+          <p:cNvPr id="6" name="TextBox 5"/>
+          <p:cNvSpPr txBox="1"/>
+          <p:nvPr/>
+        </p:nvSpPr>
+        <p:spPr>
+          <a:xfrm>
+            <a:off x="685800" y="6355080"/>
+            <a:ext cx="10817352" cy="274320"/>
           </a:xfrm>
           <a:prstGeom prst="rect">
             <a:avLst/>
@@ -12081,7 +11882,7 @@
             <a:r>
               <a:rPr sz="700">
                 <a:solidFill>
-                  <a:srgbClr val="A0B4D2"/>
+                  <a:srgbClr val="8CA0C3"/>
                 </a:solidFill>
                 <a:latin typeface="Consolas"/>
               </a:rPr>

--- a/protected-downloads/praesentation/TL06.pptx
+++ b/protected-downloads/praesentation/TL06.pptx
@@ -28,6 +28,7 @@
     <p:sldId id="276" r:id="rId28"/>
     <p:sldId id="277" r:id="rId29"/>
     <p:sldId id="278" r:id="rId30"/>
+    <p:sldId id="279" r:id="rId31"/>
   </p:sldIdLst>
   <p:sldSz cx="12188952" cy="6858000" type="screen4x3"/>
   <p:notesSz cx="6858000" cy="9144000"/>
@@ -594,17 +595,32 @@
           <a:lstStyle/>
           <a:p>
             <a:r>
-              <a:t>Selbstcheck (Sec 5) in Stille ausfüllen (ca. 3 Min.): Welche Frage ist die unbequemste?</a:t>
-            </a:r>
-          </a:p>
-          <a:p>
-            <a:r>
-              <a:t>Plenumsfrage: 'Was nehme ich heute mit – eine konkrete Handlung bis Ende dieser Woche?' 2–3 TN antworten lassen.</a:t>
-            </a:r>
-          </a:p>
-          <a:p>
-            <a:r>
-              <a:t>Transferaufgabe 3 besonders betonen: Nicht auf nach der nächsten TL-Runde verschieben.</a:t>
+              <a:t>Instruktion Sprachcheck (185–202 Min.): 'Lesen Sie Ihren Einstiegssatz vor – Rückmeldung aus Berater-Perspektive: Fühle ich mich zur Klärung eingeladen oder bereits verurteilt?'</a:t>
+            </a:r>
+          </a:p>
+          <a:p>
+            <a:r>
+              <a:t>Kein Rollenspiel – es geht um den Text, nicht um eine Gesprächssimulation.</a:t>
+            </a:r>
+          </a:p>
+          <a:p>
+            <a:r>
+              <a:t>Abwehr-Variante B (Sinnzweifel) ist eine andere Gesprächssituation als A: erst Nutzen für den Berater selbst benennen, dann Vereinbarungs-Ebene.</a:t>
+            </a:r>
+          </a:p>
+          <a:p>
+            <a:r>
+              <a:t>Zwischenerinnerung nach 10 Min.: 'Ihr Einstiegssatz muss: Sachverhalt benennen (nicht beschönigen) / Klärungsabsicht signalisieren / Einladen, nicht überrumpeln.'</a:t>
+            </a:r>
+          </a:p>
+          <a:p>
+            <a:r>
+              <a:t>Stille Überarbeitung (202–205 Min.) explizit ausweisen – geht sonst unter.</a:t>
+            </a:r>
+          </a:p>
+          <a:p>
+            <a:r>
+              <a:t>Plenum-Auswertung: Zweite Version, nicht erste. Sichtbar machen, was der Sprachcheck bewirkt hat.</a:t>
             </a:r>
           </a:p>
         </p:txBody>
@@ -674,6 +690,86 @@
           <a:lstStyle/>
           <a:p>
             <a:r>
+              <a:t>Selbstcheck (Sec 5) in Stille ausfüllen (ca. 3 Min.): Welche Frage ist die unbequemste?</a:t>
+            </a:r>
+          </a:p>
+          <a:p>
+            <a:r>
+              <a:t>Plenumsfrage: 'Was nehme ich heute mit – eine konkrete Handlung bis Ende dieser Woche?' 2–3 TN antworten lassen.</a:t>
+            </a:r>
+          </a:p>
+          <a:p>
+            <a:r>
+              <a:t>Transferaufgabe 3 besonders betonen: Nicht auf nach der nächsten TL-Runde verschieben.</a:t>
+            </a:r>
+          </a:p>
+        </p:txBody>
+      </p:sp>
+      <p:sp>
+        <p:nvSpPr>
+          <p:cNvPr id="4" name="Slide Number Placeholder 3"/>
+          <p:cNvSpPr>
+            <a:spLocks noGrp="1"/>
+          </p:cNvSpPr>
+          <p:nvPr>
+            <p:ph type="sldNum" idx="5" sz="quarter"/>
+          </p:nvPr>
+        </p:nvSpPr>
+        <p:spPr/>
+      </p:sp>
+    </p:spTree>
+  </p:cSld>
+  <p:clrMapOvr>
+    <a:masterClrMapping/>
+  </p:clrMapOvr>
+</p:notes>
+</file>
+
+<file path=ppt/notesSlides/notesSlide12.xml><?xml version="1.0" encoding="utf-8"?>
+<p:notes xmlns:a="http://schemas.openxmlformats.org/drawingml/2006/main" xmlns:p="http://schemas.openxmlformats.org/presentationml/2006/main" xmlns:r="http://schemas.openxmlformats.org/officeDocument/2006/relationships">
+  <p:cSld>
+    <p:spTree>
+      <p:nvGrpSpPr>
+        <p:cNvPr id="1" name=""/>
+        <p:cNvGrpSpPr/>
+        <p:nvPr/>
+      </p:nvGrpSpPr>
+      <p:grpSpPr>
+        <a:xfrm>
+          <a:off x="0" y="0"/>
+          <a:ext cx="0" cy="0"/>
+          <a:chOff x="0" y="0"/>
+          <a:chExt cx="0" cy="0"/>
+        </a:xfrm>
+      </p:grpSpPr>
+      <p:sp>
+        <p:nvSpPr>
+          <p:cNvPr id="2" name="Slide Image Placeholder 1"/>
+          <p:cNvSpPr>
+            <a:spLocks noGrp="1"/>
+          </p:cNvSpPr>
+          <p:nvPr>
+            <p:ph type="sldImg" idx="2"/>
+          </p:nvPr>
+        </p:nvSpPr>
+        <p:spPr/>
+      </p:sp>
+      <p:sp>
+        <p:nvSpPr>
+          <p:cNvPr id="3" name="Notes Placeholder 2"/>
+          <p:cNvSpPr>
+            <a:spLocks noGrp="1"/>
+          </p:cNvSpPr>
+          <p:nvPr>
+            <p:ph type="body" idx="3" sz="quarter"/>
+          </p:nvPr>
+        </p:nvSpPr>
+        <p:spPr/>
+        <p:txBody>
+          <a:bodyPr/>
+          <a:lstStyle/>
+          <a:p>
+            <a:r>
               <a:t>Greenleaf-Test vorlesen: 'Wachsen die Menschen, denen Sie führend begegnen – werden sie kompetenter, freier, eigenverantwortlicher?'</a:t>
             </a:r>
           </a:p>
@@ -1234,22 +1330,22 @@
           <a:lstStyle/>
           <a:p>
             <a:r>
-              <a:t>Zwischenerinnerung nach 12 Min.: 'Prüfen Sie, ob Ihr SBI ein Charaktermerkmal enthält – wenn ja, stoppen und zurück auf die Verhaltensebene.'</a:t>
-            </a:r>
-          </a:p>
-          <a:p>
-            <a:r>
-              <a:t>Kollegiale Fallberatung (130–155 Min.) in 3–4er-Gruppen nach Sec-3-Ablauf (6 Schritte): Fall vorstellen → Schlüsselfrage → Perspektivwechsel → Impulse → Klärung → nächster Schritt.</a:t>
-            </a:r>
-          </a:p>
-          <a:p>
-            <a:r>
-              <a:t>Falls niemand eigenen Fall einbringt: Markus-Szenario als Hauptfall planen.</a:t>
-            </a:r>
-          </a:p>
-          <a:p>
-            <a:r>
-              <a:t>Kein Rollenspiel – Gespräch bleibt auf Vorbereitungsebene.</a:t>
+              <a:t>TN lesen Fall still (ca. 3 Min.), dann gelenkte Plenumsdiskussion.</a:t>
+            </a:r>
+          </a:p>
+          <a:p>
+            <a:r>
+              <a:t>Lenkung auf Frage 2: Haltung Klärung vs. Eskalation. Und Frage 4: Bagatellisieren vs. Verbindlichkeit wahren.</a:t>
+            </a:r>
+          </a:p>
+          <a:p>
+            <a:r>
+              <a:t>Produktive Spannung aushalten – der Fall hat keine Musterlösung, die für jeden TL und jede Bankkultur gleich gilt.</a:t>
+            </a:r>
+          </a:p>
+          <a:p>
+            <a:r>
+              <a:t>Häufigste Bewegung im Raum: TN wollen sofort entscheiden, ob das ein Konsequenzgespräch verlangt. Bremsen: 'Wir wissen noch nicht genug. Das Nachfassgespräch klärt – das Konsequenzgespräch setzt voraus, dass Klärung bereits stattgefunden hat.'</a:t>
             </a:r>
           </a:p>
         </p:txBody>
@@ -1319,32 +1415,22 @@
           <a:lstStyle/>
           <a:p>
             <a:r>
-              <a:t>Instruktion Sprachcheck (185–202 Min.): 'Lesen Sie Ihren Einstiegssatz vor – Rückmeldung aus Berater-Perspektive: Fühle ich mich zur Klärung eingeladen oder bereits verurteilt?'</a:t>
-            </a:r>
-          </a:p>
-          <a:p>
-            <a:r>
-              <a:t>Kein Rollenspiel – es geht um den Text, nicht um eine Gesprächssimulation.</a:t>
-            </a:r>
-          </a:p>
-          <a:p>
-            <a:r>
-              <a:t>Abwehr-Variante B (Sinnzweifel) ist eine andere Gesprächssituation als A: erst Nutzen für den Berater selbst benennen, dann Vereinbarungs-Ebene.</a:t>
-            </a:r>
-          </a:p>
-          <a:p>
-            <a:r>
-              <a:t>Zwischenerinnerung nach 10 Min.: 'Ihr Einstiegssatz muss: Sachverhalt benennen (nicht beschönigen) / Klärungsabsicht signalisieren / Einladen, nicht überrumpeln.'</a:t>
-            </a:r>
-          </a:p>
-          <a:p>
-            <a:r>
-              <a:t>Stille Überarbeitung (202–205 Min.) explizit ausweisen – geht sonst unter.</a:t>
-            </a:r>
-          </a:p>
-          <a:p>
-            <a:r>
-              <a:t>Plenum-Auswertung: Zweite Version, nicht erste. Sichtbar machen, was der Sprachcheck bewirkt hat.</a:t>
+              <a:t>Zwischenerinnerung nach 12 Min.: 'Prüfen Sie, ob Ihr SBI ein Charaktermerkmal enthält – wenn ja, stoppen und zurück auf die Verhaltensebene.'</a:t>
+            </a:r>
+          </a:p>
+          <a:p>
+            <a:r>
+              <a:t>Kollegiale Fallberatung (130–155 Min.) in 3–4er-Gruppen nach Sec-3-Ablauf (6 Schritte): Fall vorstellen → Schlüsselfrage → Perspektivwechsel → Impulse → Klärung → nächster Schritt.</a:t>
+            </a:r>
+          </a:p>
+          <a:p>
+            <a:r>
+              <a:t>Falls niemand eigenen Fall einbringt: Markus-Szenario als Hauptfall planen.</a:t>
+            </a:r>
+          </a:p>
+          <a:p>
+            <a:r>
+              <a:t>Kein Rollenspiel – Gespräch bleibt auf Vorbereitungsebene.</a:t>
             </a:r>
           </a:p>
         </p:txBody>
@@ -7392,6 +7478,49 @@
             <a:avLst/>
           </a:prstGeom>
           <a:solidFill>
+            <a:srgbClr val="EDEDF3"/>
+          </a:solidFill>
+          <a:ln>
+            <a:noFill/>
+          </a:ln>
+        </p:spPr>
+        <p:style>
+          <a:lnRef idx="1">
+            <a:schemeClr val="accent1"/>
+          </a:lnRef>
+          <a:fillRef idx="3">
+            <a:schemeClr val="accent1"/>
+          </a:fillRef>
+          <a:effectRef idx="2">
+            <a:schemeClr val="accent1"/>
+          </a:effectRef>
+          <a:fontRef idx="minor">
+            <a:schemeClr val="lt1"/>
+          </a:fontRef>
+        </p:style>
+        <p:txBody>
+          <a:bodyPr rtlCol="0" anchor="ctr"/>
+          <a:lstStyle/>
+          <a:p>
+            <a:pPr algn="ctr"/>
+          </a:p>
+        </p:txBody>
+      </p:sp>
+      <p:sp>
+        <p:nvSpPr>
+          <p:cNvPr id="3" name="Rectangle 2"/>
+          <p:cNvSpPr/>
+          <p:nvPr/>
+        </p:nvSpPr>
+        <p:spPr>
+          <a:xfrm>
+            <a:off x="0" y="0"/>
+            <a:ext cx="12188952" cy="50292"/>
+          </a:xfrm>
+          <a:prstGeom prst="rect">
+            <a:avLst/>
+          </a:prstGeom>
+          <a:solidFill>
             <a:srgbClr val="1F2C56"/>
           </a:solidFill>
           <a:ln>
@@ -7422,14 +7551,14 @@
       </p:sp>
       <p:sp>
         <p:nvSpPr>
-          <p:cNvPr id="3" name="TextBox 2"/>
+          <p:cNvPr id="4" name="TextBox 3"/>
           <p:cNvSpPr txBox="1"/>
           <p:nvPr/>
         </p:nvSpPr>
         <p:spPr>
           <a:xfrm>
-            <a:off x="685800" y="2377440"/>
-            <a:ext cx="10817352" cy="365760"/>
+            <a:off x="685800" y="109728"/>
+            <a:ext cx="10817352" cy="228600"/>
           </a:xfrm>
           <a:prstGeom prst="rect">
             <a:avLst/>
@@ -7444,27 +7573,70 @@
           <a:p>
             <a:pPr algn="l"/>
             <a:r>
-              <a:rPr sz="1200">
-                <a:solidFill>
-                  <a:srgbClr val="D9C089"/>
+              <a:rPr sz="750">
+                <a:solidFill>
+                  <a:srgbClr val="78808C"/>
                 </a:solidFill>
                 <a:latin typeface="Consolas"/>
               </a:rPr>
-              <a:t>EINZELARBEIT (20 MIN.) + KOLLEGIALE FALLBERATUNG (25 MIN.)</a:t>
-            </a:r>
-          </a:p>
-        </p:txBody>
-      </p:sp>
-      <p:sp>
-        <p:nvSpPr>
-          <p:cNvPr id="4" name="Rectangle 3"/>
+              <a:t>TL06  ·  PRAXISFALL</a:t>
+            </a:r>
+          </a:p>
+        </p:txBody>
+      </p:sp>
+      <p:sp>
+        <p:nvSpPr>
+          <p:cNvPr id="5" name="Rectangle 4"/>
           <p:cNvSpPr/>
           <p:nvPr/>
         </p:nvSpPr>
         <p:spPr>
           <a:xfrm>
-            <a:off x="685800" y="2788920"/>
-            <a:ext cx="548640" cy="38100"/>
+            <a:off x="0" y="1234440"/>
+            <a:ext cx="12188952" cy="12700"/>
+          </a:xfrm>
+          <a:prstGeom prst="rect">
+            <a:avLst/>
+          </a:prstGeom>
+          <a:solidFill>
+            <a:srgbClr val="D8DFE4"/>
+          </a:solidFill>
+          <a:ln>
+            <a:noFill/>
+          </a:ln>
+        </p:spPr>
+        <p:style>
+          <a:lnRef idx="1">
+            <a:schemeClr val="accent1"/>
+          </a:lnRef>
+          <a:fillRef idx="3">
+            <a:schemeClr val="accent1"/>
+          </a:fillRef>
+          <a:effectRef idx="2">
+            <a:schemeClr val="accent1"/>
+          </a:effectRef>
+          <a:fontRef idx="minor">
+            <a:schemeClr val="lt1"/>
+          </a:fontRef>
+        </p:style>
+        <p:txBody>
+          <a:bodyPr rtlCol="0" anchor="ctr"/>
+          <a:lstStyle/>
+          <a:p>
+            <a:pPr algn="ctr"/>
+          </a:p>
+        </p:txBody>
+      </p:sp>
+      <p:sp>
+        <p:nvSpPr>
+          <p:cNvPr id="6" name="Rectangle 5"/>
+          <p:cNvSpPr/>
+          <p:nvPr/>
+        </p:nvSpPr>
+        <p:spPr>
+          <a:xfrm>
+            <a:off x="685800" y="502920"/>
+            <a:ext cx="36576" cy="658368"/>
           </a:xfrm>
           <a:prstGeom prst="rect">
             <a:avLst/>
@@ -7500,14 +7672,14 @@
       </p:sp>
       <p:sp>
         <p:nvSpPr>
-          <p:cNvPr id="5" name="TextBox 4"/>
+          <p:cNvPr id="7" name="TextBox 6"/>
           <p:cNvSpPr txBox="1"/>
           <p:nvPr/>
         </p:nvSpPr>
         <p:spPr>
           <a:xfrm>
-            <a:off x="685800" y="3017520"/>
-            <a:ext cx="10817352" cy="1463040"/>
+            <a:off x="813816" y="502920"/>
+            <a:ext cx="10634472" cy="685800"/>
           </a:xfrm>
           <a:prstGeom prst="rect">
             <a:avLst/>
@@ -7522,27 +7694,150 @@
           <a:p>
             <a:pPr algn="l"/>
             <a:r>
-              <a:rPr sz="4000" b="1" i="0">
-                <a:solidFill>
-                  <a:srgbClr val="FFFFFF"/>
+              <a:rPr sz="2400" b="1" i="0">
+                <a:solidFill>
+                  <a:srgbClr val="1F2C56"/>
                 </a:solidFill>
                 <a:latin typeface="Arial"/>
               </a:rPr>
-              <a:t>AB-1: SBI-Feedback und Entwicklungsgespräch vorbereiten</a:t>
-            </a:r>
-          </a:p>
-        </p:txBody>
-      </p:sp>
-      <p:sp>
-        <p:nvSpPr>
-          <p:cNvPr id="6" name="TextBox 5"/>
+              <a:t>Teamleiterin Sandra Kern – VR-Bank Musterregion eG</a:t>
+            </a:r>
+          </a:p>
+        </p:txBody>
+      </p:sp>
+      <p:sp>
+        <p:nvSpPr>
+          <p:cNvPr id="8" name="Rectangle 7"/>
+          <p:cNvSpPr/>
+          <p:nvPr/>
+        </p:nvSpPr>
+        <p:spPr>
+          <a:xfrm>
+            <a:off x="685800" y="1600200"/>
+            <a:ext cx="10817352" cy="1828800"/>
+          </a:xfrm>
+          <a:prstGeom prst="rect">
+            <a:avLst/>
+          </a:prstGeom>
+          <a:solidFill>
+            <a:srgbClr val="FFFFFF"/>
+          </a:solidFill>
+          <a:ln w="9525">
+            <a:solidFill>
+              <a:srgbClr val="D8DFE4"/>
+            </a:solidFill>
+          </a:ln>
+        </p:spPr>
+        <p:style>
+          <a:lnRef idx="1">
+            <a:schemeClr val="accent1"/>
+          </a:lnRef>
+          <a:fillRef idx="3">
+            <a:schemeClr val="accent1"/>
+          </a:fillRef>
+          <a:effectRef idx="2">
+            <a:schemeClr val="accent1"/>
+          </a:effectRef>
+          <a:fontRef idx="minor">
+            <a:schemeClr val="lt1"/>
+          </a:fontRef>
+        </p:style>
+        <p:txBody>
+          <a:bodyPr rtlCol="0" anchor="ctr"/>
+          <a:lstStyle/>
+          <a:p>
+            <a:pPr algn="ctr"/>
+          </a:p>
+        </p:txBody>
+      </p:sp>
+      <p:sp>
+        <p:nvSpPr>
+          <p:cNvPr id="9" name="Rectangle 8"/>
+          <p:cNvSpPr/>
+          <p:nvPr/>
+        </p:nvSpPr>
+        <p:spPr>
+          <a:xfrm>
+            <a:off x="685800" y="1600200"/>
+            <a:ext cx="36576" cy="1828800"/>
+          </a:xfrm>
+          <a:prstGeom prst="rect">
+            <a:avLst/>
+          </a:prstGeom>
+          <a:solidFill>
+            <a:srgbClr val="1F2C56"/>
+          </a:solidFill>
+          <a:ln>
+            <a:noFill/>
+          </a:ln>
+        </p:spPr>
+        <p:style>
+          <a:lnRef idx="1">
+            <a:schemeClr val="accent1"/>
+          </a:lnRef>
+          <a:fillRef idx="3">
+            <a:schemeClr val="accent1"/>
+          </a:fillRef>
+          <a:effectRef idx="2">
+            <a:schemeClr val="accent1"/>
+          </a:effectRef>
+          <a:fontRef idx="minor">
+            <a:schemeClr val="lt1"/>
+          </a:fontRef>
+        </p:style>
+        <p:txBody>
+          <a:bodyPr rtlCol="0" anchor="ctr"/>
+          <a:lstStyle/>
+          <a:p>
+            <a:pPr algn="ctr"/>
+          </a:p>
+        </p:txBody>
+      </p:sp>
+      <p:sp>
+        <p:nvSpPr>
+          <p:cNvPr id="10" name="TextBox 9"/>
           <p:cNvSpPr txBox="1"/>
           <p:nvPr/>
         </p:nvSpPr>
         <p:spPr>
           <a:xfrm>
-            <a:off x="685800" y="4480560"/>
-            <a:ext cx="8653881" cy="1280160"/>
+            <a:off x="941832" y="1783080"/>
+            <a:ext cx="10268712" cy="228600"/>
+          </a:xfrm>
+          <a:prstGeom prst="rect">
+            <a:avLst/>
+          </a:prstGeom>
+          <a:noFill/>
+        </p:spPr>
+        <p:txBody>
+          <a:bodyPr wrap="none">
+            <a:spAutoFit/>
+          </a:bodyPr>
+          <a:lstStyle/>
+          <a:p>
+            <a:pPr algn="l"/>
+            <a:r>
+              <a:rPr sz="750">
+                <a:solidFill>
+                  <a:srgbClr val="78808C"/>
+                </a:solidFill>
+                <a:latin typeface="Consolas"/>
+              </a:rPr>
+              <a:t>AUSGANGSSITUATION</a:t>
+            </a:r>
+          </a:p>
+        </p:txBody>
+      </p:sp>
+      <p:sp>
+        <p:nvSpPr>
+          <p:cNvPr id="11" name="TextBox 10"/>
+          <p:cNvSpPr txBox="1"/>
+          <p:nvPr/>
+        </p:nvSpPr>
+        <p:spPr>
+          <a:xfrm>
+            <a:off x="941832" y="2084831"/>
+            <a:ext cx="7680960" cy="1188720"/>
           </a:xfrm>
           <a:prstGeom prst="rect">
             <a:avLst/>
@@ -7555,29 +7850,77 @@
           </a:bodyPr>
           <a:lstStyle/>
           <a:p>
-            <a:pPr algn="l"/>
-            <a:r>
-              <a:rPr sz="1600" b="0" i="0">
-                <a:solidFill>
-                  <a:srgbClr val="C8D2E6"/>
+            <a:pPr>
+              <a:spcAft>
+                <a:spcPts val="600"/>
+              </a:spcAft>
+            </a:pPr>
+            <a:r>
+              <a:rPr sz="1300">
+                <a:solidFill>
+                  <a:srgbClr val="3D5466"/>
                 </a:solidFill>
                 <a:latin typeface="Arial"/>
               </a:rPr>
-              <a:t>SBI schriftlich formulieren + Stärken-SBI + Einstiegssatz entwickeln</a:t>
-            </a:r>
-          </a:p>
-        </p:txBody>
-      </p:sp>
-      <p:sp>
-        <p:nvSpPr>
-          <p:cNvPr id="7" name="TextBox 6"/>
+              <a:t>Markus W. (31 J., 4 Jahre im Haus) hat zugesagt, A-Kunden-Besuche im agree-System zu dokumentieren – Anlass war ein MaRisk-Audit. Sechs Wochen später: 2 von 11 Besuchen dokumentiert. Markus ist der stärkste Netzwerker im Team, überdurchschnittliche Neukundengewinnung, Dokumentation gilt ihm als „Papierkram“. Sandra bereitet zwei Gespräche vor: ein SBI-Feedback zur Dokumentationslücke und den Einstieg in ein Entwicklungsgespräch, das auf seinen Stärken aufbaut.
+</a:t>
+            </a:r>
+          </a:p>
+        </p:txBody>
+      </p:sp>
+      <p:sp>
+        <p:nvSpPr>
+          <p:cNvPr id="12" name="Rectangle 11"/>
+          <p:cNvSpPr/>
+          <p:nvPr/>
+        </p:nvSpPr>
+        <p:spPr>
+          <a:xfrm>
+            <a:off x="0" y="6510528"/>
+            <a:ext cx="12188952" cy="347472"/>
+          </a:xfrm>
+          <a:prstGeom prst="rect">
+            <a:avLst/>
+          </a:prstGeom>
+          <a:solidFill>
+            <a:srgbClr val="0A1937"/>
+          </a:solidFill>
+          <a:ln>
+            <a:noFill/>
+          </a:ln>
+        </p:spPr>
+        <p:style>
+          <a:lnRef idx="1">
+            <a:schemeClr val="accent1"/>
+          </a:lnRef>
+          <a:fillRef idx="3">
+            <a:schemeClr val="accent1"/>
+          </a:fillRef>
+          <a:effectRef idx="2">
+            <a:schemeClr val="accent1"/>
+          </a:effectRef>
+          <a:fontRef idx="minor">
+            <a:schemeClr val="lt1"/>
+          </a:fontRef>
+        </p:style>
+        <p:txBody>
+          <a:bodyPr rtlCol="0" anchor="ctr"/>
+          <a:lstStyle/>
+          <a:p>
+            <a:pPr algn="ctr"/>
+          </a:p>
+        </p:txBody>
+      </p:sp>
+      <p:sp>
+        <p:nvSpPr>
+          <p:cNvPr id="13" name="TextBox 12"/>
           <p:cNvSpPr txBox="1"/>
           <p:nvPr/>
         </p:nvSpPr>
         <p:spPr>
           <a:xfrm>
-            <a:off x="685800" y="6355080"/>
-            <a:ext cx="10817352" cy="274320"/>
+            <a:off x="685800" y="6583680"/>
+            <a:ext cx="6490411" cy="256032"/>
           </a:xfrm>
           <a:prstGeom prst="rect">
             <a:avLst/>
@@ -7594,11 +7937,46 @@
             <a:r>
               <a:rPr sz="700">
                 <a:solidFill>
-                  <a:srgbClr val="8CA0C3"/>
+                  <a:srgbClr val="A0B4D2"/>
                 </a:solidFill>
                 <a:latin typeface="Consolas"/>
               </a:rPr>
               <a:t>FKB Campus  ·  TL06</a:t>
+            </a:r>
+          </a:p>
+        </p:txBody>
+      </p:sp>
+      <p:sp>
+        <p:nvSpPr>
+          <p:cNvPr id="14" name="TextBox 13"/>
+          <p:cNvSpPr txBox="1"/>
+          <p:nvPr/>
+        </p:nvSpPr>
+        <p:spPr>
+          <a:xfrm>
+            <a:off x="7176211" y="6583680"/>
+            <a:ext cx="4326940" cy="256032"/>
+          </a:xfrm>
+          <a:prstGeom prst="rect">
+            <a:avLst/>
+          </a:prstGeom>
+          <a:noFill/>
+        </p:spPr>
+        <p:txBody>
+          <a:bodyPr wrap="none">
+            <a:spAutoFit/>
+          </a:bodyPr>
+          <a:lstStyle/>
+          <a:p>
+            <a:pPr algn="r"/>
+            <a:r>
+              <a:rPr sz="700">
+                <a:solidFill>
+                  <a:srgbClr val="A0B4D2"/>
+                </a:solidFill>
+                <a:latin typeface="Consolas"/>
+              </a:rPr>
+              <a:t>Fall zuerst lesen</a:t>
             </a:r>
           </a:p>
         </p:txBody>
@@ -7636,7 +8014,7 @@
             <a:avLst/>
           </a:prstGeom>
           <a:solidFill>
-            <a:srgbClr val="EDEDF3"/>
+            <a:srgbClr val="1F2C56"/>
           </a:solidFill>
           <a:ln>
             <a:noFill/>
@@ -7666,57 +8044,14 @@
       </p:sp>
       <p:sp>
         <p:nvSpPr>
-          <p:cNvPr id="3" name="Rectangle 2"/>
-          <p:cNvSpPr/>
-          <p:nvPr/>
-        </p:nvSpPr>
-        <p:spPr>
-          <a:xfrm>
-            <a:off x="0" y="0"/>
-            <a:ext cx="12188952" cy="50292"/>
-          </a:xfrm>
-          <a:prstGeom prst="rect">
-            <a:avLst/>
-          </a:prstGeom>
-          <a:solidFill>
-            <a:srgbClr val="1F2C56"/>
-          </a:solidFill>
-          <a:ln>
-            <a:noFill/>
-          </a:ln>
-        </p:spPr>
-        <p:style>
-          <a:lnRef idx="1">
-            <a:schemeClr val="accent1"/>
-          </a:lnRef>
-          <a:fillRef idx="3">
-            <a:schemeClr val="accent1"/>
-          </a:fillRef>
-          <a:effectRef idx="2">
-            <a:schemeClr val="accent1"/>
-          </a:effectRef>
-          <a:fontRef idx="minor">
-            <a:schemeClr val="lt1"/>
-          </a:fontRef>
-        </p:style>
-        <p:txBody>
-          <a:bodyPr rtlCol="0" anchor="ctr"/>
-          <a:lstStyle/>
-          <a:p>
-            <a:pPr algn="ctr"/>
-          </a:p>
-        </p:txBody>
-      </p:sp>
-      <p:sp>
-        <p:nvSpPr>
-          <p:cNvPr id="4" name="TextBox 3"/>
+          <p:cNvPr id="3" name="TextBox 2"/>
           <p:cNvSpPr txBox="1"/>
           <p:nvPr/>
         </p:nvSpPr>
         <p:spPr>
           <a:xfrm>
-            <a:off x="685800" y="109728"/>
-            <a:ext cx="10817352" cy="228600"/>
+            <a:off x="685800" y="2377440"/>
+            <a:ext cx="10817352" cy="365760"/>
           </a:xfrm>
           <a:prstGeom prst="rect">
             <a:avLst/>
@@ -7731,70 +8066,27 @@
           <a:p>
             <a:pPr algn="l"/>
             <a:r>
-              <a:rPr sz="750">
-                <a:solidFill>
-                  <a:srgbClr val="78808C"/>
+              <a:rPr sz="1200">
+                <a:solidFill>
+                  <a:srgbClr val="D9C089"/>
                 </a:solidFill>
                 <a:latin typeface="Consolas"/>
               </a:rPr>
-              <a:t>TL06  ·  ARBEITSBLATT</a:t>
-            </a:r>
-          </a:p>
-        </p:txBody>
-      </p:sp>
-      <p:sp>
-        <p:nvSpPr>
-          <p:cNvPr id="5" name="Rectangle 4"/>
+              <a:t>EINZELARBEIT (20 MIN.) + KOLLEGIALE FALLBERATUNG (25 MIN.)</a:t>
+            </a:r>
+          </a:p>
+        </p:txBody>
+      </p:sp>
+      <p:sp>
+        <p:nvSpPr>
+          <p:cNvPr id="4" name="Rectangle 3"/>
           <p:cNvSpPr/>
           <p:nvPr/>
         </p:nvSpPr>
         <p:spPr>
           <a:xfrm>
-            <a:off x="0" y="1234440"/>
-            <a:ext cx="12188952" cy="12700"/>
-          </a:xfrm>
-          <a:prstGeom prst="rect">
-            <a:avLst/>
-          </a:prstGeom>
-          <a:solidFill>
-            <a:srgbClr val="D8DFE4"/>
-          </a:solidFill>
-          <a:ln>
-            <a:noFill/>
-          </a:ln>
-        </p:spPr>
-        <p:style>
-          <a:lnRef idx="1">
-            <a:schemeClr val="accent1"/>
-          </a:lnRef>
-          <a:fillRef idx="3">
-            <a:schemeClr val="accent1"/>
-          </a:fillRef>
-          <a:effectRef idx="2">
-            <a:schemeClr val="accent1"/>
-          </a:effectRef>
-          <a:fontRef idx="minor">
-            <a:schemeClr val="lt1"/>
-          </a:fontRef>
-        </p:style>
-        <p:txBody>
-          <a:bodyPr rtlCol="0" anchor="ctr"/>
-          <a:lstStyle/>
-          <a:p>
-            <a:pPr algn="ctr"/>
-          </a:p>
-        </p:txBody>
-      </p:sp>
-      <p:sp>
-        <p:nvSpPr>
-          <p:cNvPr id="6" name="Rectangle 5"/>
-          <p:cNvSpPr/>
-          <p:nvPr/>
-        </p:nvSpPr>
-        <p:spPr>
-          <a:xfrm>
-            <a:off x="685800" y="502920"/>
-            <a:ext cx="36576" cy="658368"/>
+            <a:off x="685800" y="2788920"/>
+            <a:ext cx="548640" cy="38100"/>
           </a:xfrm>
           <a:prstGeom prst="rect">
             <a:avLst/>
@@ -7830,14 +8122,14 @@
       </p:sp>
       <p:sp>
         <p:nvSpPr>
-          <p:cNvPr id="7" name="TextBox 6"/>
+          <p:cNvPr id="5" name="TextBox 4"/>
           <p:cNvSpPr txBox="1"/>
           <p:nvPr/>
         </p:nvSpPr>
         <p:spPr>
           <a:xfrm>
-            <a:off x="813816" y="502920"/>
-            <a:ext cx="10634472" cy="685800"/>
+            <a:off x="685800" y="3017520"/>
+            <a:ext cx="10817352" cy="1463040"/>
           </a:xfrm>
           <a:prstGeom prst="rect">
             <a:avLst/>
@@ -7852,27 +8144,27 @@
           <a:p>
             <a:pPr algn="l"/>
             <a:r>
-              <a:rPr sz="2400" b="1" i="0">
-                <a:solidFill>
-                  <a:srgbClr val="1F2C56"/>
+              <a:rPr sz="4000" b="1" i="0">
+                <a:solidFill>
+                  <a:srgbClr val="FFFFFF"/>
                 </a:solidFill>
                 <a:latin typeface="Arial"/>
               </a:rPr>
-              <a:t>AB-1: Verhalten beschreiben, bevor das Gespräch beginnt</a:t>
-            </a:r>
-          </a:p>
-        </p:txBody>
-      </p:sp>
-      <p:sp>
-        <p:nvSpPr>
-          <p:cNvPr id="8" name="TextBox 7"/>
+              <a:t>AB-1: SBI-Feedback und Entwicklungsgespräch vorbereiten</a:t>
+            </a:r>
+          </a:p>
+        </p:txBody>
+      </p:sp>
+      <p:sp>
+        <p:nvSpPr>
+          <p:cNvPr id="6" name="TextBox 5"/>
           <p:cNvSpPr txBox="1"/>
           <p:nvPr/>
         </p:nvSpPr>
         <p:spPr>
           <a:xfrm>
-            <a:off x="685800" y="1554480"/>
-            <a:ext cx="10817352" cy="3840480"/>
+            <a:off x="685800" y="4480560"/>
+            <a:ext cx="8653881" cy="1280160"/>
           </a:xfrm>
           <a:prstGeom prst="rect">
             <a:avLst/>
@@ -7885,233 +8177,29 @@
           </a:bodyPr>
           <a:lstStyle/>
           <a:p>
-            <a:pPr marL="190500" indent="-190500">
-              <a:spcBef>
-                <a:spcPts val="400"/>
-              </a:spcBef>
-              <a:spcAft>
-                <a:spcPts val="200"/>
-              </a:spcAft>
-            </a:pPr>
-            <a:r>
-              <a:rPr sz="1400">
-                <a:solidFill>
-                  <a:srgbClr val="3D5466"/>
+            <a:pPr algn="l"/>
+            <a:r>
+              <a:rPr sz="1600" b="0" i="0">
+                <a:solidFill>
+                  <a:srgbClr val="C8D2E6"/>
                 </a:solidFill>
                 <a:latin typeface="Arial"/>
               </a:rPr>
-              <a:t>▸  Teil A: S / B / I für Markus – kein Charaktermerkmal.</a:t>
-            </a:r>
-          </a:p>
-          <a:p>
-            <a:pPr marL="190500" indent="-190500">
-              <a:spcBef>
-                <a:spcPts val="400"/>
-              </a:spcBef>
-              <a:spcAft>
-                <a:spcPts val="200"/>
-              </a:spcAft>
-            </a:pPr>
-            <a:r>
-              <a:rPr sz="1400">
-                <a:solidFill>
-                  <a:srgbClr val="3D5466"/>
-                </a:solidFill>
-                <a:latin typeface="Arial"/>
-              </a:rPr>
-              <a:t>▸  Prüffrage: Adressiert der Impact die Sachebene?</a:t>
-            </a:r>
-          </a:p>
-          <a:p>
-            <a:pPr marL="190500" indent="-190500">
-              <a:spcBef>
-                <a:spcPts val="400"/>
-              </a:spcBef>
-              <a:spcAft>
-                <a:spcPts val="200"/>
-              </a:spcAft>
-            </a:pPr>
-            <a:r>
-              <a:rPr sz="1400">
-                <a:solidFill>
-                  <a:srgbClr val="3D5466"/>
-                </a:solidFill>
-                <a:latin typeface="Arial"/>
-              </a:rPr>
-              <a:t>▸  Teil B: Stärken-SBI für Markus' Netzwerk-Stärke.</a:t>
-            </a:r>
-          </a:p>
-          <a:p>
-            <a:pPr marL="190500" indent="-190500">
-              <a:spcBef>
-                <a:spcPts val="400"/>
-              </a:spcBef>
-              <a:spcAft>
-                <a:spcPts val="200"/>
-              </a:spcAft>
-            </a:pPr>
-            <a:r>
-              <a:rPr sz="1400">
-                <a:solidFill>
-                  <a:srgbClr val="3D5466"/>
-                </a:solidFill>
-                <a:latin typeface="Arial"/>
-              </a:rPr>
-              <a:t>▸  Eines Entwicklungsfeld – Hebelwirkung begründen.</a:t>
-            </a:r>
-          </a:p>
-          <a:p>
-            <a:pPr marL="190500" indent="-190500">
-              <a:spcBef>
-                <a:spcPts val="400"/>
-              </a:spcBef>
-              <a:spcAft>
-                <a:spcPts val="200"/>
-              </a:spcAft>
-            </a:pPr>
-            <a:r>
-              <a:rPr sz="1400">
-                <a:solidFill>
-                  <a:srgbClr val="3D5466"/>
-                </a:solidFill>
-                <a:latin typeface="Arial"/>
-              </a:rPr>
-              <a:t>▸  Einstiegssatz: Entwicklungsabsicht, kein Defizit-Einstieg.</a:t>
-            </a:r>
-          </a:p>
-        </p:txBody>
-      </p:sp>
-      <p:sp>
-        <p:nvSpPr>
-          <p:cNvPr id="9" name="Rectangle 8"/>
-          <p:cNvSpPr/>
-          <p:nvPr/>
-        </p:nvSpPr>
-        <p:spPr>
-          <a:xfrm>
-            <a:off x="685800" y="5486400"/>
-            <a:ext cx="10817352" cy="640080"/>
-          </a:xfrm>
-          <a:prstGeom prst="rect">
-            <a:avLst/>
-          </a:prstGeom>
-          <a:solidFill>
-            <a:srgbClr val="1F2C56"/>
-          </a:solidFill>
-          <a:ln>
-            <a:noFill/>
-          </a:ln>
-        </p:spPr>
-        <p:style>
-          <a:lnRef idx="1">
-            <a:schemeClr val="accent1"/>
-          </a:lnRef>
-          <a:fillRef idx="3">
-            <a:schemeClr val="accent1"/>
-          </a:fillRef>
-          <a:effectRef idx="2">
-            <a:schemeClr val="accent1"/>
-          </a:effectRef>
-          <a:fontRef idx="minor">
-            <a:schemeClr val="lt1"/>
-          </a:fontRef>
-        </p:style>
-        <p:txBody>
-          <a:bodyPr rtlCol="0" anchor="ctr"/>
-          <a:lstStyle/>
-          <a:p>
-            <a:pPr algn="ctr"/>
-          </a:p>
-        </p:txBody>
-      </p:sp>
-      <p:sp>
-        <p:nvSpPr>
-          <p:cNvPr id="10" name="TextBox 9"/>
+              <a:t>SBI schriftlich formulieren + Stärken-SBI + Einstiegssatz entwickeln</a:t>
+            </a:r>
+          </a:p>
+        </p:txBody>
+      </p:sp>
+      <p:sp>
+        <p:nvSpPr>
+          <p:cNvPr id="7" name="TextBox 6"/>
           <p:cNvSpPr txBox="1"/>
           <p:nvPr/>
         </p:nvSpPr>
         <p:spPr>
           <a:xfrm>
-            <a:off x="868680" y="5596128"/>
-            <a:ext cx="10451592" cy="457200"/>
-          </a:xfrm>
-          <a:prstGeom prst="rect">
-            <a:avLst/>
-          </a:prstGeom>
-          <a:noFill/>
-        </p:spPr>
-        <p:txBody>
-          <a:bodyPr wrap="square">
-            <a:spAutoFit/>
-          </a:bodyPr>
-          <a:lstStyle/>
-          <a:p>
-            <a:pPr algn="l"/>
-            <a:r>
-              <a:rPr sz="1300" b="1" i="0">
-                <a:solidFill>
-                  <a:srgbClr val="FFFFFF"/>
-                </a:solidFill>
-                <a:latin typeface="Arial"/>
-              </a:rPr>
-              <a:t>→  Bearbeitung im Teilnehmer-Workbook (Arbeitsblatt mit Ausfüllfeldern)</a:t>
-            </a:r>
-          </a:p>
-        </p:txBody>
-      </p:sp>
-      <p:sp>
-        <p:nvSpPr>
-          <p:cNvPr id="11" name="Rectangle 10"/>
-          <p:cNvSpPr/>
-          <p:nvPr/>
-        </p:nvSpPr>
-        <p:spPr>
-          <a:xfrm>
-            <a:off x="0" y="6510528"/>
-            <a:ext cx="12188952" cy="347472"/>
-          </a:xfrm>
-          <a:prstGeom prst="rect">
-            <a:avLst/>
-          </a:prstGeom>
-          <a:solidFill>
-            <a:srgbClr val="0A1937"/>
-          </a:solidFill>
-          <a:ln>
-            <a:noFill/>
-          </a:ln>
-        </p:spPr>
-        <p:style>
-          <a:lnRef idx="1">
-            <a:schemeClr val="accent1"/>
-          </a:lnRef>
-          <a:fillRef idx="3">
-            <a:schemeClr val="accent1"/>
-          </a:fillRef>
-          <a:effectRef idx="2">
-            <a:schemeClr val="accent1"/>
-          </a:effectRef>
-          <a:fontRef idx="minor">
-            <a:schemeClr val="lt1"/>
-          </a:fontRef>
-        </p:style>
-        <p:txBody>
-          <a:bodyPr rtlCol="0" anchor="ctr"/>
-          <a:lstStyle/>
-          <a:p>
-            <a:pPr algn="ctr"/>
-          </a:p>
-        </p:txBody>
-      </p:sp>
-      <p:sp>
-        <p:nvSpPr>
-          <p:cNvPr id="12" name="TextBox 11"/>
-          <p:cNvSpPr txBox="1"/>
-          <p:nvPr/>
-        </p:nvSpPr>
-        <p:spPr>
-          <a:xfrm>
-            <a:off x="685800" y="6583680"/>
-            <a:ext cx="6490411" cy="256032"/>
+            <a:off x="685800" y="6355080"/>
+            <a:ext cx="10817352" cy="274320"/>
           </a:xfrm>
           <a:prstGeom prst="rect">
             <a:avLst/>
@@ -8128,7 +8216,7 @@
             <a:r>
               <a:rPr sz="700">
                 <a:solidFill>
-                  <a:srgbClr val="A0B4D2"/>
+                  <a:srgbClr val="8CA0C3"/>
                 </a:solidFill>
                 <a:latin typeface="Consolas"/>
               </a:rPr>
@@ -8170,6 +8258,49 @@
             <a:avLst/>
           </a:prstGeom>
           <a:solidFill>
+            <a:srgbClr val="EDEDF3"/>
+          </a:solidFill>
+          <a:ln>
+            <a:noFill/>
+          </a:ln>
+        </p:spPr>
+        <p:style>
+          <a:lnRef idx="1">
+            <a:schemeClr val="accent1"/>
+          </a:lnRef>
+          <a:fillRef idx="3">
+            <a:schemeClr val="accent1"/>
+          </a:fillRef>
+          <a:effectRef idx="2">
+            <a:schemeClr val="accent1"/>
+          </a:effectRef>
+          <a:fontRef idx="minor">
+            <a:schemeClr val="lt1"/>
+          </a:fontRef>
+        </p:style>
+        <p:txBody>
+          <a:bodyPr rtlCol="0" anchor="ctr"/>
+          <a:lstStyle/>
+          <a:p>
+            <a:pPr algn="ctr"/>
+          </a:p>
+        </p:txBody>
+      </p:sp>
+      <p:sp>
+        <p:nvSpPr>
+          <p:cNvPr id="3" name="Rectangle 2"/>
+          <p:cNvSpPr/>
+          <p:nvPr/>
+        </p:nvSpPr>
+        <p:spPr>
+          <a:xfrm>
+            <a:off x="0" y="0"/>
+            <a:ext cx="12188952" cy="50292"/>
+          </a:xfrm>
+          <a:prstGeom prst="rect">
+            <a:avLst/>
+          </a:prstGeom>
+          <a:solidFill>
             <a:srgbClr val="1F2C56"/>
           </a:solidFill>
           <a:ln>
@@ -8200,14 +8331,14 @@
       </p:sp>
       <p:sp>
         <p:nvSpPr>
-          <p:cNvPr id="3" name="TextBox 2"/>
+          <p:cNvPr id="4" name="TextBox 3"/>
           <p:cNvSpPr txBox="1"/>
           <p:nvPr/>
         </p:nvSpPr>
         <p:spPr>
           <a:xfrm>
-            <a:off x="685800" y="2377440"/>
-            <a:ext cx="10817352" cy="365760"/>
+            <a:off x="685800" y="109728"/>
+            <a:ext cx="10817352" cy="228600"/>
           </a:xfrm>
           <a:prstGeom prst="rect">
             <a:avLst/>
@@ -8222,27 +8353,70 @@
           <a:p>
             <a:pPr algn="l"/>
             <a:r>
-              <a:rPr sz="1200">
-                <a:solidFill>
-                  <a:srgbClr val="D9C089"/>
+              <a:rPr sz="750">
+                <a:solidFill>
+                  <a:srgbClr val="78808C"/>
                 </a:solidFill>
                 <a:latin typeface="Consolas"/>
               </a:rPr>
-              <a:t>EINZELARBEIT (20 MIN.) + SPRACHCHECK (17 MIN.) + STILLE ÜBERARBEITUNG (3 MIN.)</a:t>
-            </a:r>
-          </a:p>
-        </p:txBody>
-      </p:sp>
-      <p:sp>
-        <p:nvSpPr>
-          <p:cNvPr id="4" name="Rectangle 3"/>
+              <a:t>TL06  ·  ARBEITSBLATT</a:t>
+            </a:r>
+          </a:p>
+        </p:txBody>
+      </p:sp>
+      <p:sp>
+        <p:nvSpPr>
+          <p:cNvPr id="5" name="Rectangle 4"/>
           <p:cNvSpPr/>
           <p:nvPr/>
         </p:nvSpPr>
         <p:spPr>
           <a:xfrm>
-            <a:off x="685800" y="2788920"/>
-            <a:ext cx="548640" cy="38100"/>
+            <a:off x="0" y="1234440"/>
+            <a:ext cx="12188952" cy="12700"/>
+          </a:xfrm>
+          <a:prstGeom prst="rect">
+            <a:avLst/>
+          </a:prstGeom>
+          <a:solidFill>
+            <a:srgbClr val="D8DFE4"/>
+          </a:solidFill>
+          <a:ln>
+            <a:noFill/>
+          </a:ln>
+        </p:spPr>
+        <p:style>
+          <a:lnRef idx="1">
+            <a:schemeClr val="accent1"/>
+          </a:lnRef>
+          <a:fillRef idx="3">
+            <a:schemeClr val="accent1"/>
+          </a:fillRef>
+          <a:effectRef idx="2">
+            <a:schemeClr val="accent1"/>
+          </a:effectRef>
+          <a:fontRef idx="minor">
+            <a:schemeClr val="lt1"/>
+          </a:fontRef>
+        </p:style>
+        <p:txBody>
+          <a:bodyPr rtlCol="0" anchor="ctr"/>
+          <a:lstStyle/>
+          <a:p>
+            <a:pPr algn="ctr"/>
+          </a:p>
+        </p:txBody>
+      </p:sp>
+      <p:sp>
+        <p:nvSpPr>
+          <p:cNvPr id="6" name="Rectangle 5"/>
+          <p:cNvSpPr/>
+          <p:nvPr/>
+        </p:nvSpPr>
+        <p:spPr>
+          <a:xfrm>
+            <a:off x="685800" y="502920"/>
+            <a:ext cx="36576" cy="658368"/>
           </a:xfrm>
           <a:prstGeom prst="rect">
             <a:avLst/>
@@ -8278,14 +8452,14 @@
       </p:sp>
       <p:sp>
         <p:nvSpPr>
-          <p:cNvPr id="5" name="TextBox 4"/>
+          <p:cNvPr id="7" name="TextBox 6"/>
           <p:cNvSpPr txBox="1"/>
           <p:nvPr/>
         </p:nvSpPr>
         <p:spPr>
           <a:xfrm>
-            <a:off x="685800" y="3017520"/>
-            <a:ext cx="10817352" cy="1463040"/>
+            <a:off x="813816" y="502920"/>
+            <a:ext cx="10634472" cy="685800"/>
           </a:xfrm>
           <a:prstGeom prst="rect">
             <a:avLst/>
@@ -8300,27 +8474,27 @@
           <a:p>
             <a:pPr algn="l"/>
             <a:r>
-              <a:rPr sz="4000" b="1" i="0">
-                <a:solidFill>
-                  <a:srgbClr val="FFFFFF"/>
+              <a:rPr sz="2400" b="1" i="0">
+                <a:solidFill>
+                  <a:srgbClr val="1F2C56"/>
                 </a:solidFill>
                 <a:latin typeface="Arial"/>
               </a:rPr>
-              <a:t>AB-2: Das Nachfassgespräch schriftlich ausarbeiten</a:t>
-            </a:r>
-          </a:p>
-        </p:txBody>
-      </p:sp>
-      <p:sp>
-        <p:nvSpPr>
-          <p:cNvPr id="6" name="TextBox 5"/>
+              <a:t>AB-1: Verhalten beschreiben, bevor das Gespräch beginnt</a:t>
+            </a:r>
+          </a:p>
+        </p:txBody>
+      </p:sp>
+      <p:sp>
+        <p:nvSpPr>
+          <p:cNvPr id="8" name="TextBox 7"/>
           <p:cNvSpPr txBox="1"/>
           <p:nvPr/>
         </p:nvSpPr>
         <p:spPr>
           <a:xfrm>
-            <a:off x="685800" y="4480560"/>
-            <a:ext cx="8653881" cy="1280160"/>
+            <a:off x="685800" y="1554480"/>
+            <a:ext cx="10817352" cy="3840480"/>
           </a:xfrm>
           <a:prstGeom prst="rect">
             <a:avLst/>
@@ -8333,29 +8507,233 @@
           </a:bodyPr>
           <a:lstStyle/>
           <a:p>
+            <a:pPr marL="190500" indent="-190500">
+              <a:spcBef>
+                <a:spcPts val="400"/>
+              </a:spcBef>
+              <a:spcAft>
+                <a:spcPts val="200"/>
+              </a:spcAft>
+            </a:pPr>
+            <a:r>
+              <a:rPr sz="1400">
+                <a:solidFill>
+                  <a:srgbClr val="3D5466"/>
+                </a:solidFill>
+                <a:latin typeface="Arial"/>
+              </a:rPr>
+              <a:t>▸  Teil A: S / B / I für Markus – kein Charaktermerkmal.</a:t>
+            </a:r>
+          </a:p>
+          <a:p>
+            <a:pPr marL="190500" indent="-190500">
+              <a:spcBef>
+                <a:spcPts val="400"/>
+              </a:spcBef>
+              <a:spcAft>
+                <a:spcPts val="200"/>
+              </a:spcAft>
+            </a:pPr>
+            <a:r>
+              <a:rPr sz="1400">
+                <a:solidFill>
+                  <a:srgbClr val="3D5466"/>
+                </a:solidFill>
+                <a:latin typeface="Arial"/>
+              </a:rPr>
+              <a:t>▸  Prüffrage: Adressiert der Impact die Sachebene?</a:t>
+            </a:r>
+          </a:p>
+          <a:p>
+            <a:pPr marL="190500" indent="-190500">
+              <a:spcBef>
+                <a:spcPts val="400"/>
+              </a:spcBef>
+              <a:spcAft>
+                <a:spcPts val="200"/>
+              </a:spcAft>
+            </a:pPr>
+            <a:r>
+              <a:rPr sz="1400">
+                <a:solidFill>
+                  <a:srgbClr val="3D5466"/>
+                </a:solidFill>
+                <a:latin typeface="Arial"/>
+              </a:rPr>
+              <a:t>▸  Teil B: Stärken-SBI für Markus' Netzwerk-Stärke.</a:t>
+            </a:r>
+          </a:p>
+          <a:p>
+            <a:pPr marL="190500" indent="-190500">
+              <a:spcBef>
+                <a:spcPts val="400"/>
+              </a:spcBef>
+              <a:spcAft>
+                <a:spcPts val="200"/>
+              </a:spcAft>
+            </a:pPr>
+            <a:r>
+              <a:rPr sz="1400">
+                <a:solidFill>
+                  <a:srgbClr val="3D5466"/>
+                </a:solidFill>
+                <a:latin typeface="Arial"/>
+              </a:rPr>
+              <a:t>▸  Eines Entwicklungsfeld – Hebelwirkung begründen.</a:t>
+            </a:r>
+          </a:p>
+          <a:p>
+            <a:pPr marL="190500" indent="-190500">
+              <a:spcBef>
+                <a:spcPts val="400"/>
+              </a:spcBef>
+              <a:spcAft>
+                <a:spcPts val="200"/>
+              </a:spcAft>
+            </a:pPr>
+            <a:r>
+              <a:rPr sz="1400">
+                <a:solidFill>
+                  <a:srgbClr val="3D5466"/>
+                </a:solidFill>
+                <a:latin typeface="Arial"/>
+              </a:rPr>
+              <a:t>▸  Einstiegssatz: Entwicklungsabsicht, kein Defizit-Einstieg.</a:t>
+            </a:r>
+          </a:p>
+        </p:txBody>
+      </p:sp>
+      <p:sp>
+        <p:nvSpPr>
+          <p:cNvPr id="9" name="Rectangle 8"/>
+          <p:cNvSpPr/>
+          <p:nvPr/>
+        </p:nvSpPr>
+        <p:spPr>
+          <a:xfrm>
+            <a:off x="685800" y="5486400"/>
+            <a:ext cx="10817352" cy="640080"/>
+          </a:xfrm>
+          <a:prstGeom prst="rect">
+            <a:avLst/>
+          </a:prstGeom>
+          <a:solidFill>
+            <a:srgbClr val="1F2C56"/>
+          </a:solidFill>
+          <a:ln>
+            <a:noFill/>
+          </a:ln>
+        </p:spPr>
+        <p:style>
+          <a:lnRef idx="1">
+            <a:schemeClr val="accent1"/>
+          </a:lnRef>
+          <a:fillRef idx="3">
+            <a:schemeClr val="accent1"/>
+          </a:fillRef>
+          <a:effectRef idx="2">
+            <a:schemeClr val="accent1"/>
+          </a:effectRef>
+          <a:fontRef idx="minor">
+            <a:schemeClr val="lt1"/>
+          </a:fontRef>
+        </p:style>
+        <p:txBody>
+          <a:bodyPr rtlCol="0" anchor="ctr"/>
+          <a:lstStyle/>
+          <a:p>
+            <a:pPr algn="ctr"/>
+          </a:p>
+        </p:txBody>
+      </p:sp>
+      <p:sp>
+        <p:nvSpPr>
+          <p:cNvPr id="10" name="TextBox 9"/>
+          <p:cNvSpPr txBox="1"/>
+          <p:nvPr/>
+        </p:nvSpPr>
+        <p:spPr>
+          <a:xfrm>
+            <a:off x="868680" y="5596128"/>
+            <a:ext cx="10451592" cy="457200"/>
+          </a:xfrm>
+          <a:prstGeom prst="rect">
+            <a:avLst/>
+          </a:prstGeom>
+          <a:noFill/>
+        </p:spPr>
+        <p:txBody>
+          <a:bodyPr wrap="square">
+            <a:spAutoFit/>
+          </a:bodyPr>
+          <a:lstStyle/>
+          <a:p>
             <a:pPr algn="l"/>
             <a:r>
-              <a:rPr sz="1600" b="0" i="0">
-                <a:solidFill>
-                  <a:srgbClr val="C8D2E6"/>
+              <a:rPr sz="1300" b="1" i="0">
+                <a:solidFill>
+                  <a:srgbClr val="FFFFFF"/>
                 </a:solidFill>
                 <a:latin typeface="Arial"/>
               </a:rPr>
-              <a:t>Haltung klären → Einstiegssatz formulieren → Abwehr vorbereiten</a:t>
-            </a:r>
-          </a:p>
-        </p:txBody>
-      </p:sp>
-      <p:sp>
-        <p:nvSpPr>
-          <p:cNvPr id="7" name="TextBox 6"/>
+              <a:t>→  Bearbeitung im Teilnehmer-Workbook (Arbeitsblatt mit Ausfüllfeldern)</a:t>
+            </a:r>
+          </a:p>
+        </p:txBody>
+      </p:sp>
+      <p:sp>
+        <p:nvSpPr>
+          <p:cNvPr id="11" name="Rectangle 10"/>
+          <p:cNvSpPr/>
+          <p:nvPr/>
+        </p:nvSpPr>
+        <p:spPr>
+          <a:xfrm>
+            <a:off x="0" y="6510528"/>
+            <a:ext cx="12188952" cy="347472"/>
+          </a:xfrm>
+          <a:prstGeom prst="rect">
+            <a:avLst/>
+          </a:prstGeom>
+          <a:solidFill>
+            <a:srgbClr val="0A1937"/>
+          </a:solidFill>
+          <a:ln>
+            <a:noFill/>
+          </a:ln>
+        </p:spPr>
+        <p:style>
+          <a:lnRef idx="1">
+            <a:schemeClr val="accent1"/>
+          </a:lnRef>
+          <a:fillRef idx="3">
+            <a:schemeClr val="accent1"/>
+          </a:fillRef>
+          <a:effectRef idx="2">
+            <a:schemeClr val="accent1"/>
+          </a:effectRef>
+          <a:fontRef idx="minor">
+            <a:schemeClr val="lt1"/>
+          </a:fontRef>
+        </p:style>
+        <p:txBody>
+          <a:bodyPr rtlCol="0" anchor="ctr"/>
+          <a:lstStyle/>
+          <a:p>
+            <a:pPr algn="ctr"/>
+          </a:p>
+        </p:txBody>
+      </p:sp>
+      <p:sp>
+        <p:nvSpPr>
+          <p:cNvPr id="12" name="TextBox 11"/>
           <p:cNvSpPr txBox="1"/>
           <p:nvPr/>
         </p:nvSpPr>
         <p:spPr>
           <a:xfrm>
-            <a:off x="685800" y="6355080"/>
-            <a:ext cx="10817352" cy="274320"/>
+            <a:off x="685800" y="6583680"/>
+            <a:ext cx="6490411" cy="256032"/>
           </a:xfrm>
           <a:prstGeom prst="rect">
             <a:avLst/>
@@ -8372,7 +8750,7 @@
             <a:r>
               <a:rPr sz="700">
                 <a:solidFill>
-                  <a:srgbClr val="8CA0C3"/>
+                  <a:srgbClr val="A0B4D2"/>
                 </a:solidFill>
                 <a:latin typeface="Consolas"/>
               </a:rPr>
@@ -8796,7 +9174,7 @@
             <a:avLst/>
           </a:prstGeom>
           <a:solidFill>
-            <a:srgbClr val="EDEDF3"/>
+            <a:srgbClr val="1F2C56"/>
           </a:solidFill>
           <a:ln>
             <a:noFill/>
@@ -8826,57 +9204,14 @@
       </p:sp>
       <p:sp>
         <p:nvSpPr>
-          <p:cNvPr id="3" name="Rectangle 2"/>
-          <p:cNvSpPr/>
-          <p:nvPr/>
-        </p:nvSpPr>
-        <p:spPr>
-          <a:xfrm>
-            <a:off x="0" y="0"/>
-            <a:ext cx="12188952" cy="50292"/>
-          </a:xfrm>
-          <a:prstGeom prst="rect">
-            <a:avLst/>
-          </a:prstGeom>
-          <a:solidFill>
-            <a:srgbClr val="1F2C56"/>
-          </a:solidFill>
-          <a:ln>
-            <a:noFill/>
-          </a:ln>
-        </p:spPr>
-        <p:style>
-          <a:lnRef idx="1">
-            <a:schemeClr val="accent1"/>
-          </a:lnRef>
-          <a:fillRef idx="3">
-            <a:schemeClr val="accent1"/>
-          </a:fillRef>
-          <a:effectRef idx="2">
-            <a:schemeClr val="accent1"/>
-          </a:effectRef>
-          <a:fontRef idx="minor">
-            <a:schemeClr val="lt1"/>
-          </a:fontRef>
-        </p:style>
-        <p:txBody>
-          <a:bodyPr rtlCol="0" anchor="ctr"/>
-          <a:lstStyle/>
-          <a:p>
-            <a:pPr algn="ctr"/>
-          </a:p>
-        </p:txBody>
-      </p:sp>
-      <p:sp>
-        <p:nvSpPr>
-          <p:cNvPr id="4" name="TextBox 3"/>
+          <p:cNvPr id="3" name="TextBox 2"/>
           <p:cNvSpPr txBox="1"/>
           <p:nvPr/>
         </p:nvSpPr>
         <p:spPr>
           <a:xfrm>
-            <a:off x="685800" y="109728"/>
-            <a:ext cx="10817352" cy="228600"/>
+            <a:off x="685800" y="2377440"/>
+            <a:ext cx="10817352" cy="365760"/>
           </a:xfrm>
           <a:prstGeom prst="rect">
             <a:avLst/>
@@ -8891,70 +9226,27 @@
           <a:p>
             <a:pPr algn="l"/>
             <a:r>
-              <a:rPr sz="750">
-                <a:solidFill>
-                  <a:srgbClr val="78808C"/>
+              <a:rPr sz="1200">
+                <a:solidFill>
+                  <a:srgbClr val="D9C089"/>
                 </a:solidFill>
                 <a:latin typeface="Consolas"/>
               </a:rPr>
-              <a:t>TL06  ·  ARBEITSBLATT</a:t>
-            </a:r>
-          </a:p>
-        </p:txBody>
-      </p:sp>
-      <p:sp>
-        <p:nvSpPr>
-          <p:cNvPr id="5" name="Rectangle 4"/>
+              <a:t>EINZELARBEIT (20 MIN.) + SPRACHCHECK (17 MIN.) + STILLE ÜBERARBEITUNG (3 MIN.)</a:t>
+            </a:r>
+          </a:p>
+        </p:txBody>
+      </p:sp>
+      <p:sp>
+        <p:nvSpPr>
+          <p:cNvPr id="4" name="Rectangle 3"/>
           <p:cNvSpPr/>
           <p:nvPr/>
         </p:nvSpPr>
         <p:spPr>
           <a:xfrm>
-            <a:off x="0" y="1234440"/>
-            <a:ext cx="12188952" cy="12700"/>
-          </a:xfrm>
-          <a:prstGeom prst="rect">
-            <a:avLst/>
-          </a:prstGeom>
-          <a:solidFill>
-            <a:srgbClr val="D8DFE4"/>
-          </a:solidFill>
-          <a:ln>
-            <a:noFill/>
-          </a:ln>
-        </p:spPr>
-        <p:style>
-          <a:lnRef idx="1">
-            <a:schemeClr val="accent1"/>
-          </a:lnRef>
-          <a:fillRef idx="3">
-            <a:schemeClr val="accent1"/>
-          </a:fillRef>
-          <a:effectRef idx="2">
-            <a:schemeClr val="accent1"/>
-          </a:effectRef>
-          <a:fontRef idx="minor">
-            <a:schemeClr val="lt1"/>
-          </a:fontRef>
-        </p:style>
-        <p:txBody>
-          <a:bodyPr rtlCol="0" anchor="ctr"/>
-          <a:lstStyle/>
-          <a:p>
-            <a:pPr algn="ctr"/>
-          </a:p>
-        </p:txBody>
-      </p:sp>
-      <p:sp>
-        <p:nvSpPr>
-          <p:cNvPr id="6" name="Rectangle 5"/>
-          <p:cNvSpPr/>
-          <p:nvPr/>
-        </p:nvSpPr>
-        <p:spPr>
-          <a:xfrm>
-            <a:off x="685800" y="502920"/>
-            <a:ext cx="36576" cy="658368"/>
+            <a:off x="685800" y="2788920"/>
+            <a:ext cx="548640" cy="38100"/>
           </a:xfrm>
           <a:prstGeom prst="rect">
             <a:avLst/>
@@ -8990,14 +9282,14 @@
       </p:sp>
       <p:sp>
         <p:nvSpPr>
-          <p:cNvPr id="7" name="TextBox 6"/>
+          <p:cNvPr id="5" name="TextBox 4"/>
           <p:cNvSpPr txBox="1"/>
           <p:nvPr/>
         </p:nvSpPr>
         <p:spPr>
           <a:xfrm>
-            <a:off x="813816" y="502920"/>
-            <a:ext cx="10634472" cy="685800"/>
+            <a:off x="685800" y="3017520"/>
+            <a:ext cx="10817352" cy="1463040"/>
           </a:xfrm>
           <a:prstGeom prst="rect">
             <a:avLst/>
@@ -9012,27 +9304,27 @@
           <a:p>
             <a:pPr algn="l"/>
             <a:r>
-              <a:rPr sz="2400" b="1" i="0">
-                <a:solidFill>
-                  <a:srgbClr val="1F2C56"/>
+              <a:rPr sz="4000" b="1" i="0">
+                <a:solidFill>
+                  <a:srgbClr val="FFFFFF"/>
                 </a:solidFill>
                 <a:latin typeface="Arial"/>
               </a:rPr>
-              <a:t>AB-2: Den Einstiegssatz schreiben, nicht proben</a:t>
-            </a:r>
-          </a:p>
-        </p:txBody>
-      </p:sp>
-      <p:sp>
-        <p:nvSpPr>
-          <p:cNvPr id="8" name="TextBox 7"/>
+              <a:t>AB-2: Das Nachfassgespräch schriftlich ausarbeiten</a:t>
+            </a:r>
+          </a:p>
+        </p:txBody>
+      </p:sp>
+      <p:sp>
+        <p:nvSpPr>
+          <p:cNvPr id="6" name="TextBox 5"/>
           <p:cNvSpPr txBox="1"/>
           <p:nvPr/>
         </p:nvSpPr>
         <p:spPr>
           <a:xfrm>
-            <a:off x="685800" y="1554480"/>
-            <a:ext cx="10817352" cy="3840480"/>
+            <a:off x="685800" y="4480560"/>
+            <a:ext cx="8653881" cy="1280160"/>
           </a:xfrm>
           <a:prstGeom prst="rect">
             <a:avLst/>
@@ -9045,233 +9337,29 @@
           </a:bodyPr>
           <a:lstStyle/>
           <a:p>
-            <a:pPr marL="190500" indent="-190500">
-              <a:spcBef>
-                <a:spcPts val="400"/>
-              </a:spcBef>
-              <a:spcAft>
-                <a:spcPts val="200"/>
-              </a:spcAft>
-            </a:pPr>
-            <a:r>
-              <a:rPr sz="1400">
-                <a:solidFill>
-                  <a:srgbClr val="3D5466"/>
+            <a:pPr algn="l"/>
+            <a:r>
+              <a:rPr sz="1600" b="0" i="0">
+                <a:solidFill>
+                  <a:srgbClr val="C8D2E6"/>
                 </a:solidFill>
                 <a:latin typeface="Arial"/>
               </a:rPr>
-              <a:t>▸  Schritt 1: Haltung klären – Klärung oder Eskalation?</a:t>
-            </a:r>
-          </a:p>
-          <a:p>
-            <a:pPr marL="190500" indent="-190500">
-              <a:spcBef>
-                <a:spcPts val="400"/>
-              </a:spcBef>
-              <a:spcAft>
-                <a:spcPts val="200"/>
-              </a:spcAft>
-            </a:pPr>
-            <a:r>
-              <a:rPr sz="1400">
-                <a:solidFill>
-                  <a:srgbClr val="3D5466"/>
-                </a:solidFill>
-                <a:latin typeface="Arial"/>
-              </a:rPr>
-              <a:t>▸  Schritt 2: Gesprächsziel: Was soll am Ende stehen?</a:t>
-            </a:r>
-          </a:p>
-          <a:p>
-            <a:pPr marL="190500" indent="-190500">
-              <a:spcBef>
-                <a:spcPts val="400"/>
-              </a:spcBef>
-              <a:spcAft>
-                <a:spcPts val="200"/>
-              </a:spcAft>
-            </a:pPr>
-            <a:r>
-              <a:rPr sz="1400">
-                <a:solidFill>
-                  <a:srgbClr val="3D5466"/>
-                </a:solidFill>
-                <a:latin typeface="Arial"/>
-              </a:rPr>
-              <a:t>▸  Schritt 3: Einstiegssatz – benennen, nicht anklagen, einladen.</a:t>
-            </a:r>
-          </a:p>
-          <a:p>
-            <a:pPr marL="190500" indent="-190500">
-              <a:spcBef>
-                <a:spcPts val="400"/>
-              </a:spcBef>
-              <a:spcAft>
-                <a:spcPts val="200"/>
-              </a:spcAft>
-            </a:pPr>
-            <a:r>
-              <a:rPr sz="1400">
-                <a:solidFill>
-                  <a:srgbClr val="3D5466"/>
-                </a:solidFill>
-                <a:latin typeface="Arial"/>
-              </a:rPr>
-              <a:t>▸  Schritt 4: Abwehr A (Zeitknappheit) und B (Sinnzweifel) vorbereiten.</a:t>
-            </a:r>
-          </a:p>
-          <a:p>
-            <a:pPr marL="190500" indent="-190500">
-              <a:spcBef>
-                <a:spcPts val="400"/>
-              </a:spcBef>
-              <a:spcAft>
-                <a:spcPts val="200"/>
-              </a:spcAft>
-            </a:pPr>
-            <a:r>
-              <a:rPr sz="1400">
-                <a:solidFill>
-                  <a:srgbClr val="3D5466"/>
-                </a:solidFill>
-                <a:latin typeface="Arial"/>
-              </a:rPr>
-              <a:t>▸  Schritt 5: Vereinbarung am Gesprächsende formulieren.</a:t>
-            </a:r>
-          </a:p>
-        </p:txBody>
-      </p:sp>
-      <p:sp>
-        <p:nvSpPr>
-          <p:cNvPr id="9" name="Rectangle 8"/>
-          <p:cNvSpPr/>
-          <p:nvPr/>
-        </p:nvSpPr>
-        <p:spPr>
-          <a:xfrm>
-            <a:off x="685800" y="5486400"/>
-            <a:ext cx="10817352" cy="640080"/>
-          </a:xfrm>
-          <a:prstGeom prst="rect">
-            <a:avLst/>
-          </a:prstGeom>
-          <a:solidFill>
-            <a:srgbClr val="1F2C56"/>
-          </a:solidFill>
-          <a:ln>
-            <a:noFill/>
-          </a:ln>
-        </p:spPr>
-        <p:style>
-          <a:lnRef idx="1">
-            <a:schemeClr val="accent1"/>
-          </a:lnRef>
-          <a:fillRef idx="3">
-            <a:schemeClr val="accent1"/>
-          </a:fillRef>
-          <a:effectRef idx="2">
-            <a:schemeClr val="accent1"/>
-          </a:effectRef>
-          <a:fontRef idx="minor">
-            <a:schemeClr val="lt1"/>
-          </a:fontRef>
-        </p:style>
-        <p:txBody>
-          <a:bodyPr rtlCol="0" anchor="ctr"/>
-          <a:lstStyle/>
-          <a:p>
-            <a:pPr algn="ctr"/>
-          </a:p>
-        </p:txBody>
-      </p:sp>
-      <p:sp>
-        <p:nvSpPr>
-          <p:cNvPr id="10" name="TextBox 9"/>
+              <a:t>Haltung klären → Einstiegssatz formulieren → Abwehr vorbereiten</a:t>
+            </a:r>
+          </a:p>
+        </p:txBody>
+      </p:sp>
+      <p:sp>
+        <p:nvSpPr>
+          <p:cNvPr id="7" name="TextBox 6"/>
           <p:cNvSpPr txBox="1"/>
           <p:nvPr/>
         </p:nvSpPr>
         <p:spPr>
           <a:xfrm>
-            <a:off x="868680" y="5596128"/>
-            <a:ext cx="10451592" cy="457200"/>
-          </a:xfrm>
-          <a:prstGeom prst="rect">
-            <a:avLst/>
-          </a:prstGeom>
-          <a:noFill/>
-        </p:spPr>
-        <p:txBody>
-          <a:bodyPr wrap="square">
-            <a:spAutoFit/>
-          </a:bodyPr>
-          <a:lstStyle/>
-          <a:p>
-            <a:pPr algn="l"/>
-            <a:r>
-              <a:rPr sz="1300" b="1" i="0">
-                <a:solidFill>
-                  <a:srgbClr val="FFFFFF"/>
-                </a:solidFill>
-                <a:latin typeface="Arial"/>
-              </a:rPr>
-              <a:t>→  Bearbeitung im Teilnehmer-Workbook (Arbeitsblatt mit Ausfüllfeldern)</a:t>
-            </a:r>
-          </a:p>
-        </p:txBody>
-      </p:sp>
-      <p:sp>
-        <p:nvSpPr>
-          <p:cNvPr id="11" name="Rectangle 10"/>
-          <p:cNvSpPr/>
-          <p:nvPr/>
-        </p:nvSpPr>
-        <p:spPr>
-          <a:xfrm>
-            <a:off x="0" y="6510528"/>
-            <a:ext cx="12188952" cy="347472"/>
-          </a:xfrm>
-          <a:prstGeom prst="rect">
-            <a:avLst/>
-          </a:prstGeom>
-          <a:solidFill>
-            <a:srgbClr val="0A1937"/>
-          </a:solidFill>
-          <a:ln>
-            <a:noFill/>
-          </a:ln>
-        </p:spPr>
-        <p:style>
-          <a:lnRef idx="1">
-            <a:schemeClr val="accent1"/>
-          </a:lnRef>
-          <a:fillRef idx="3">
-            <a:schemeClr val="accent1"/>
-          </a:fillRef>
-          <a:effectRef idx="2">
-            <a:schemeClr val="accent1"/>
-          </a:effectRef>
-          <a:fontRef idx="minor">
-            <a:schemeClr val="lt1"/>
-          </a:fontRef>
-        </p:style>
-        <p:txBody>
-          <a:bodyPr rtlCol="0" anchor="ctr"/>
-          <a:lstStyle/>
-          <a:p>
-            <a:pPr algn="ctr"/>
-          </a:p>
-        </p:txBody>
-      </p:sp>
-      <p:sp>
-        <p:nvSpPr>
-          <p:cNvPr id="12" name="TextBox 11"/>
-          <p:cNvSpPr txBox="1"/>
-          <p:nvPr/>
-        </p:nvSpPr>
-        <p:spPr>
-          <a:xfrm>
-            <a:off x="685800" y="6583680"/>
-            <a:ext cx="6490411" cy="256032"/>
+            <a:off x="685800" y="6355080"/>
+            <a:ext cx="10817352" cy="274320"/>
           </a:xfrm>
           <a:prstGeom prst="rect">
             <a:avLst/>
@@ -9288,7 +9376,7 @@
             <a:r>
               <a:rPr sz="700">
                 <a:solidFill>
-                  <a:srgbClr val="A0B4D2"/>
+                  <a:srgbClr val="8CA0C3"/>
                 </a:solidFill>
                 <a:latin typeface="Consolas"/>
               </a:rPr>
@@ -9330,6 +9418,49 @@
             <a:avLst/>
           </a:prstGeom>
           <a:solidFill>
+            <a:srgbClr val="EDEDF3"/>
+          </a:solidFill>
+          <a:ln>
+            <a:noFill/>
+          </a:ln>
+        </p:spPr>
+        <p:style>
+          <a:lnRef idx="1">
+            <a:schemeClr val="accent1"/>
+          </a:lnRef>
+          <a:fillRef idx="3">
+            <a:schemeClr val="accent1"/>
+          </a:fillRef>
+          <a:effectRef idx="2">
+            <a:schemeClr val="accent1"/>
+          </a:effectRef>
+          <a:fontRef idx="minor">
+            <a:schemeClr val="lt1"/>
+          </a:fontRef>
+        </p:style>
+        <p:txBody>
+          <a:bodyPr rtlCol="0" anchor="ctr"/>
+          <a:lstStyle/>
+          <a:p>
+            <a:pPr algn="ctr"/>
+          </a:p>
+        </p:txBody>
+      </p:sp>
+      <p:sp>
+        <p:nvSpPr>
+          <p:cNvPr id="3" name="Rectangle 2"/>
+          <p:cNvSpPr/>
+          <p:nvPr/>
+        </p:nvSpPr>
+        <p:spPr>
+          <a:xfrm>
+            <a:off x="0" y="0"/>
+            <a:ext cx="12188952" cy="50292"/>
+          </a:xfrm>
+          <a:prstGeom prst="rect">
+            <a:avLst/>
+          </a:prstGeom>
+          <a:solidFill>
             <a:srgbClr val="1F2C56"/>
           </a:solidFill>
           <a:ln>
@@ -9360,14 +9491,14 @@
       </p:sp>
       <p:sp>
         <p:nvSpPr>
-          <p:cNvPr id="3" name="TextBox 2"/>
+          <p:cNvPr id="4" name="TextBox 3"/>
           <p:cNvSpPr txBox="1"/>
           <p:nvPr/>
         </p:nvSpPr>
         <p:spPr>
           <a:xfrm>
-            <a:off x="685800" y="2377440"/>
-            <a:ext cx="10817352" cy="365760"/>
+            <a:off x="685800" y="109728"/>
+            <a:ext cx="10817352" cy="228600"/>
           </a:xfrm>
           <a:prstGeom prst="rect">
             <a:avLst/>
@@ -9382,27 +9513,70 @@
           <a:p>
             <a:pPr algn="l"/>
             <a:r>
-              <a:rPr sz="1200">
-                <a:solidFill>
-                  <a:srgbClr val="D9C089"/>
+              <a:rPr sz="750">
+                <a:solidFill>
+                  <a:srgbClr val="78808C"/>
                 </a:solidFill>
                 <a:latin typeface="Consolas"/>
               </a:rPr>
-              <a:t>ABSCHLUSS</a:t>
-            </a:r>
-          </a:p>
-        </p:txBody>
-      </p:sp>
-      <p:sp>
-        <p:nvSpPr>
-          <p:cNvPr id="4" name="Rectangle 3"/>
+              <a:t>TL06  ·  ARBEITSBLATT</a:t>
+            </a:r>
+          </a:p>
+        </p:txBody>
+      </p:sp>
+      <p:sp>
+        <p:nvSpPr>
+          <p:cNvPr id="5" name="Rectangle 4"/>
           <p:cNvSpPr/>
           <p:nvPr/>
         </p:nvSpPr>
         <p:spPr>
           <a:xfrm>
-            <a:off x="685800" y="2788920"/>
-            <a:ext cx="548640" cy="38100"/>
+            <a:off x="0" y="1234440"/>
+            <a:ext cx="12188952" cy="12700"/>
+          </a:xfrm>
+          <a:prstGeom prst="rect">
+            <a:avLst/>
+          </a:prstGeom>
+          <a:solidFill>
+            <a:srgbClr val="D8DFE4"/>
+          </a:solidFill>
+          <a:ln>
+            <a:noFill/>
+          </a:ln>
+        </p:spPr>
+        <p:style>
+          <a:lnRef idx="1">
+            <a:schemeClr val="accent1"/>
+          </a:lnRef>
+          <a:fillRef idx="3">
+            <a:schemeClr val="accent1"/>
+          </a:fillRef>
+          <a:effectRef idx="2">
+            <a:schemeClr val="accent1"/>
+          </a:effectRef>
+          <a:fontRef idx="minor">
+            <a:schemeClr val="lt1"/>
+          </a:fontRef>
+        </p:style>
+        <p:txBody>
+          <a:bodyPr rtlCol="0" anchor="ctr"/>
+          <a:lstStyle/>
+          <a:p>
+            <a:pPr algn="ctr"/>
+          </a:p>
+        </p:txBody>
+      </p:sp>
+      <p:sp>
+        <p:nvSpPr>
+          <p:cNvPr id="6" name="Rectangle 5"/>
+          <p:cNvSpPr/>
+          <p:nvPr/>
+        </p:nvSpPr>
+        <p:spPr>
+          <a:xfrm>
+            <a:off x="685800" y="502920"/>
+            <a:ext cx="36576" cy="658368"/>
           </a:xfrm>
           <a:prstGeom prst="rect">
             <a:avLst/>
@@ -9438,14 +9612,14 @@
       </p:sp>
       <p:sp>
         <p:nvSpPr>
-          <p:cNvPr id="5" name="TextBox 4"/>
+          <p:cNvPr id="7" name="TextBox 6"/>
           <p:cNvSpPr txBox="1"/>
           <p:nvPr/>
         </p:nvSpPr>
         <p:spPr>
           <a:xfrm>
-            <a:off x="685800" y="3017520"/>
-            <a:ext cx="10817352" cy="1463040"/>
+            <a:off x="813816" y="502920"/>
+            <a:ext cx="10634472" cy="685800"/>
           </a:xfrm>
           <a:prstGeom prst="rect">
             <a:avLst/>
@@ -9460,27 +9634,27 @@
           <a:p>
             <a:pPr algn="l"/>
             <a:r>
-              <a:rPr sz="4000" b="1" i="0">
-                <a:solidFill>
-                  <a:srgbClr val="FFFFFF"/>
+              <a:rPr sz="2400" b="1" i="0">
+                <a:solidFill>
+                  <a:srgbClr val="1F2C56"/>
                 </a:solidFill>
                 <a:latin typeface="Arial"/>
               </a:rPr>
-              <a:t>Transfer &amp; Haltung</a:t>
-            </a:r>
-          </a:p>
-        </p:txBody>
-      </p:sp>
-      <p:sp>
-        <p:nvSpPr>
-          <p:cNvPr id="6" name="TextBox 5"/>
+              <a:t>AB-2: Den Einstiegssatz schreiben, nicht proben</a:t>
+            </a:r>
+          </a:p>
+        </p:txBody>
+      </p:sp>
+      <p:sp>
+        <p:nvSpPr>
+          <p:cNvPr id="8" name="TextBox 7"/>
           <p:cNvSpPr txBox="1"/>
           <p:nvPr/>
         </p:nvSpPr>
         <p:spPr>
           <a:xfrm>
-            <a:off x="685800" y="4480560"/>
-            <a:ext cx="8653881" cy="1280160"/>
+            <a:off x="685800" y="1554480"/>
+            <a:ext cx="10817352" cy="3840480"/>
           </a:xfrm>
           <a:prstGeom prst="rect">
             <a:avLst/>
@@ -9493,29 +9667,233 @@
           </a:bodyPr>
           <a:lstStyle/>
           <a:p>
+            <a:pPr marL="190500" indent="-190500">
+              <a:spcBef>
+                <a:spcPts val="400"/>
+              </a:spcBef>
+              <a:spcAft>
+                <a:spcPts val="200"/>
+              </a:spcAft>
+            </a:pPr>
+            <a:r>
+              <a:rPr sz="1400">
+                <a:solidFill>
+                  <a:srgbClr val="3D5466"/>
+                </a:solidFill>
+                <a:latin typeface="Arial"/>
+              </a:rPr>
+              <a:t>▸  Schritt 1: Haltung klären – Klärung oder Eskalation?</a:t>
+            </a:r>
+          </a:p>
+          <a:p>
+            <a:pPr marL="190500" indent="-190500">
+              <a:spcBef>
+                <a:spcPts val="400"/>
+              </a:spcBef>
+              <a:spcAft>
+                <a:spcPts val="200"/>
+              </a:spcAft>
+            </a:pPr>
+            <a:r>
+              <a:rPr sz="1400">
+                <a:solidFill>
+                  <a:srgbClr val="3D5466"/>
+                </a:solidFill>
+                <a:latin typeface="Arial"/>
+              </a:rPr>
+              <a:t>▸  Schritt 2: Gesprächsziel: Was soll am Ende stehen?</a:t>
+            </a:r>
+          </a:p>
+          <a:p>
+            <a:pPr marL="190500" indent="-190500">
+              <a:spcBef>
+                <a:spcPts val="400"/>
+              </a:spcBef>
+              <a:spcAft>
+                <a:spcPts val="200"/>
+              </a:spcAft>
+            </a:pPr>
+            <a:r>
+              <a:rPr sz="1400">
+                <a:solidFill>
+                  <a:srgbClr val="3D5466"/>
+                </a:solidFill>
+                <a:latin typeface="Arial"/>
+              </a:rPr>
+              <a:t>▸  Schritt 3: Einstiegssatz – benennen, nicht anklagen, einladen.</a:t>
+            </a:r>
+          </a:p>
+          <a:p>
+            <a:pPr marL="190500" indent="-190500">
+              <a:spcBef>
+                <a:spcPts val="400"/>
+              </a:spcBef>
+              <a:spcAft>
+                <a:spcPts val="200"/>
+              </a:spcAft>
+            </a:pPr>
+            <a:r>
+              <a:rPr sz="1400">
+                <a:solidFill>
+                  <a:srgbClr val="3D5466"/>
+                </a:solidFill>
+                <a:latin typeface="Arial"/>
+              </a:rPr>
+              <a:t>▸  Schritt 4: Abwehr A (Zeitknappheit) und B (Sinnzweifel) vorbereiten.</a:t>
+            </a:r>
+          </a:p>
+          <a:p>
+            <a:pPr marL="190500" indent="-190500">
+              <a:spcBef>
+                <a:spcPts val="400"/>
+              </a:spcBef>
+              <a:spcAft>
+                <a:spcPts val="200"/>
+              </a:spcAft>
+            </a:pPr>
+            <a:r>
+              <a:rPr sz="1400">
+                <a:solidFill>
+                  <a:srgbClr val="3D5466"/>
+                </a:solidFill>
+                <a:latin typeface="Arial"/>
+              </a:rPr>
+              <a:t>▸  Schritt 5: Vereinbarung am Gesprächsende formulieren.</a:t>
+            </a:r>
+          </a:p>
+        </p:txBody>
+      </p:sp>
+      <p:sp>
+        <p:nvSpPr>
+          <p:cNvPr id="9" name="Rectangle 8"/>
+          <p:cNvSpPr/>
+          <p:nvPr/>
+        </p:nvSpPr>
+        <p:spPr>
+          <a:xfrm>
+            <a:off x="685800" y="5486400"/>
+            <a:ext cx="10817352" cy="640080"/>
+          </a:xfrm>
+          <a:prstGeom prst="rect">
+            <a:avLst/>
+          </a:prstGeom>
+          <a:solidFill>
+            <a:srgbClr val="1F2C56"/>
+          </a:solidFill>
+          <a:ln>
+            <a:noFill/>
+          </a:ln>
+        </p:spPr>
+        <p:style>
+          <a:lnRef idx="1">
+            <a:schemeClr val="accent1"/>
+          </a:lnRef>
+          <a:fillRef idx="3">
+            <a:schemeClr val="accent1"/>
+          </a:fillRef>
+          <a:effectRef idx="2">
+            <a:schemeClr val="accent1"/>
+          </a:effectRef>
+          <a:fontRef idx="minor">
+            <a:schemeClr val="lt1"/>
+          </a:fontRef>
+        </p:style>
+        <p:txBody>
+          <a:bodyPr rtlCol="0" anchor="ctr"/>
+          <a:lstStyle/>
+          <a:p>
+            <a:pPr algn="ctr"/>
+          </a:p>
+        </p:txBody>
+      </p:sp>
+      <p:sp>
+        <p:nvSpPr>
+          <p:cNvPr id="10" name="TextBox 9"/>
+          <p:cNvSpPr txBox="1"/>
+          <p:nvPr/>
+        </p:nvSpPr>
+        <p:spPr>
+          <a:xfrm>
+            <a:off x="868680" y="5596128"/>
+            <a:ext cx="10451592" cy="457200"/>
+          </a:xfrm>
+          <a:prstGeom prst="rect">
+            <a:avLst/>
+          </a:prstGeom>
+          <a:noFill/>
+        </p:spPr>
+        <p:txBody>
+          <a:bodyPr wrap="square">
+            <a:spAutoFit/>
+          </a:bodyPr>
+          <a:lstStyle/>
+          <a:p>
             <a:pPr algn="l"/>
             <a:r>
-              <a:rPr sz="1600" b="0" i="0">
-                <a:solidFill>
-                  <a:srgbClr val="C8D2E6"/>
+              <a:rPr sz="1300" b="1" i="0">
+                <a:solidFill>
+                  <a:srgbClr val="FFFFFF"/>
                 </a:solidFill>
                 <a:latin typeface="Arial"/>
               </a:rPr>
-              <a:t>Drei Aufgaben für die Praxis – ein persönlicher Prüfstein – Brücke zu TL07</a:t>
-            </a:r>
-          </a:p>
-        </p:txBody>
-      </p:sp>
-      <p:sp>
-        <p:nvSpPr>
-          <p:cNvPr id="7" name="TextBox 6"/>
+              <a:t>→  Bearbeitung im Teilnehmer-Workbook (Arbeitsblatt mit Ausfüllfeldern)</a:t>
+            </a:r>
+          </a:p>
+        </p:txBody>
+      </p:sp>
+      <p:sp>
+        <p:nvSpPr>
+          <p:cNvPr id="11" name="Rectangle 10"/>
+          <p:cNvSpPr/>
+          <p:nvPr/>
+        </p:nvSpPr>
+        <p:spPr>
+          <a:xfrm>
+            <a:off x="0" y="6510528"/>
+            <a:ext cx="12188952" cy="347472"/>
+          </a:xfrm>
+          <a:prstGeom prst="rect">
+            <a:avLst/>
+          </a:prstGeom>
+          <a:solidFill>
+            <a:srgbClr val="0A1937"/>
+          </a:solidFill>
+          <a:ln>
+            <a:noFill/>
+          </a:ln>
+        </p:spPr>
+        <p:style>
+          <a:lnRef idx="1">
+            <a:schemeClr val="accent1"/>
+          </a:lnRef>
+          <a:fillRef idx="3">
+            <a:schemeClr val="accent1"/>
+          </a:fillRef>
+          <a:effectRef idx="2">
+            <a:schemeClr val="accent1"/>
+          </a:effectRef>
+          <a:fontRef idx="minor">
+            <a:schemeClr val="lt1"/>
+          </a:fontRef>
+        </p:style>
+        <p:txBody>
+          <a:bodyPr rtlCol="0" anchor="ctr"/>
+          <a:lstStyle/>
+          <a:p>
+            <a:pPr algn="ctr"/>
+          </a:p>
+        </p:txBody>
+      </p:sp>
+      <p:sp>
+        <p:nvSpPr>
+          <p:cNvPr id="12" name="TextBox 11"/>
           <p:cNvSpPr txBox="1"/>
           <p:nvPr/>
         </p:nvSpPr>
         <p:spPr>
           <a:xfrm>
-            <a:off x="685800" y="6355080"/>
-            <a:ext cx="10817352" cy="274320"/>
+            <a:off x="685800" y="6583680"/>
+            <a:ext cx="6490411" cy="256032"/>
           </a:xfrm>
           <a:prstGeom prst="rect">
             <a:avLst/>
@@ -9532,7 +9910,7 @@
             <a:r>
               <a:rPr sz="700">
                 <a:solidFill>
-                  <a:srgbClr val="8CA0C3"/>
+                  <a:srgbClr val="A0B4D2"/>
                 </a:solidFill>
                 <a:latin typeface="Consolas"/>
               </a:rPr>
@@ -9574,7 +9952,7 @@
             <a:avLst/>
           </a:prstGeom>
           <a:solidFill>
-            <a:srgbClr val="EDEDF3"/>
+            <a:srgbClr val="1F2C56"/>
           </a:solidFill>
           <a:ln>
             <a:noFill/>
@@ -9604,57 +9982,14 @@
       </p:sp>
       <p:sp>
         <p:nvSpPr>
-          <p:cNvPr id="3" name="Rectangle 2"/>
-          <p:cNvSpPr/>
-          <p:nvPr/>
-        </p:nvSpPr>
-        <p:spPr>
-          <a:xfrm>
-            <a:off x="0" y="0"/>
-            <a:ext cx="12188952" cy="50292"/>
-          </a:xfrm>
-          <a:prstGeom prst="rect">
-            <a:avLst/>
-          </a:prstGeom>
-          <a:solidFill>
-            <a:srgbClr val="1F2C56"/>
-          </a:solidFill>
-          <a:ln>
-            <a:noFill/>
-          </a:ln>
-        </p:spPr>
-        <p:style>
-          <a:lnRef idx="1">
-            <a:schemeClr val="accent1"/>
-          </a:lnRef>
-          <a:fillRef idx="3">
-            <a:schemeClr val="accent1"/>
-          </a:fillRef>
-          <a:effectRef idx="2">
-            <a:schemeClr val="accent1"/>
-          </a:effectRef>
-          <a:fontRef idx="minor">
-            <a:schemeClr val="lt1"/>
-          </a:fontRef>
-        </p:style>
-        <p:txBody>
-          <a:bodyPr rtlCol="0" anchor="ctr"/>
-          <a:lstStyle/>
-          <a:p>
-            <a:pPr algn="ctr"/>
-          </a:p>
-        </p:txBody>
-      </p:sp>
-      <p:sp>
-        <p:nvSpPr>
-          <p:cNvPr id="4" name="TextBox 3"/>
+          <p:cNvPr id="3" name="TextBox 2"/>
           <p:cNvSpPr txBox="1"/>
           <p:nvPr/>
         </p:nvSpPr>
         <p:spPr>
           <a:xfrm>
-            <a:off x="685800" y="109728"/>
-            <a:ext cx="10817352" cy="228600"/>
+            <a:off x="685800" y="2377440"/>
+            <a:ext cx="10817352" cy="365760"/>
           </a:xfrm>
           <a:prstGeom prst="rect">
             <a:avLst/>
@@ -9669,70 +10004,27 @@
           <a:p>
             <a:pPr algn="l"/>
             <a:r>
-              <a:rPr sz="750">
-                <a:solidFill>
-                  <a:srgbClr val="78808C"/>
+              <a:rPr sz="1200">
+                <a:solidFill>
+                  <a:srgbClr val="D9C089"/>
                 </a:solidFill>
                 <a:latin typeface="Consolas"/>
               </a:rPr>
-              <a:t>TL06  ·  INHALT</a:t>
-            </a:r>
-          </a:p>
-        </p:txBody>
-      </p:sp>
-      <p:sp>
-        <p:nvSpPr>
-          <p:cNvPr id="5" name="Rectangle 4"/>
+              <a:t>ABSCHLUSS</a:t>
+            </a:r>
+          </a:p>
+        </p:txBody>
+      </p:sp>
+      <p:sp>
+        <p:nvSpPr>
+          <p:cNvPr id="4" name="Rectangle 3"/>
           <p:cNvSpPr/>
           <p:nvPr/>
         </p:nvSpPr>
         <p:spPr>
           <a:xfrm>
-            <a:off x="0" y="1234440"/>
-            <a:ext cx="12188952" cy="12700"/>
-          </a:xfrm>
-          <a:prstGeom prst="rect">
-            <a:avLst/>
-          </a:prstGeom>
-          <a:solidFill>
-            <a:srgbClr val="D8DFE4"/>
-          </a:solidFill>
-          <a:ln>
-            <a:noFill/>
-          </a:ln>
-        </p:spPr>
-        <p:style>
-          <a:lnRef idx="1">
-            <a:schemeClr val="accent1"/>
-          </a:lnRef>
-          <a:fillRef idx="3">
-            <a:schemeClr val="accent1"/>
-          </a:fillRef>
-          <a:effectRef idx="2">
-            <a:schemeClr val="accent1"/>
-          </a:effectRef>
-          <a:fontRef idx="minor">
-            <a:schemeClr val="lt1"/>
-          </a:fontRef>
-        </p:style>
-        <p:txBody>
-          <a:bodyPr rtlCol="0" anchor="ctr"/>
-          <a:lstStyle/>
-          <a:p>
-            <a:pPr algn="ctr"/>
-          </a:p>
-        </p:txBody>
-      </p:sp>
-      <p:sp>
-        <p:nvSpPr>
-          <p:cNvPr id="6" name="Rectangle 5"/>
-          <p:cNvSpPr/>
-          <p:nvPr/>
-        </p:nvSpPr>
-        <p:spPr>
-          <a:xfrm>
-            <a:off x="685800" y="502920"/>
-            <a:ext cx="36576" cy="658368"/>
+            <a:off x="685800" y="2788920"/>
+            <a:ext cx="548640" cy="38100"/>
           </a:xfrm>
           <a:prstGeom prst="rect">
             <a:avLst/>
@@ -9768,14 +10060,14 @@
       </p:sp>
       <p:sp>
         <p:nvSpPr>
-          <p:cNvPr id="7" name="TextBox 6"/>
+          <p:cNvPr id="5" name="TextBox 4"/>
           <p:cNvSpPr txBox="1"/>
           <p:nvPr/>
         </p:nvSpPr>
         <p:spPr>
           <a:xfrm>
-            <a:off x="813816" y="502920"/>
-            <a:ext cx="10634472" cy="685800"/>
+            <a:off x="685800" y="3017520"/>
+            <a:ext cx="10817352" cy="1463040"/>
           </a:xfrm>
           <a:prstGeom prst="rect">
             <a:avLst/>
@@ -9790,27 +10082,27 @@
           <a:p>
             <a:pPr algn="l"/>
             <a:r>
-              <a:rPr sz="2400" b="1" i="0">
-                <a:solidFill>
-                  <a:srgbClr val="1F2C56"/>
+              <a:rPr sz="4000" b="1" i="0">
+                <a:solidFill>
+                  <a:srgbClr val="FFFFFF"/>
                 </a:solidFill>
                 <a:latin typeface="Arial"/>
               </a:rPr>
-              <a:t>Drei Transferaufgaben für die nächsten zehn Tage</a:t>
-            </a:r>
-          </a:p>
-        </p:txBody>
-      </p:sp>
-      <p:sp>
-        <p:nvSpPr>
-          <p:cNvPr id="8" name="TextBox 7"/>
+              <a:t>Transfer &amp; Haltung</a:t>
+            </a:r>
+          </a:p>
+        </p:txBody>
+      </p:sp>
+      <p:sp>
+        <p:nvSpPr>
+          <p:cNvPr id="6" name="TextBox 5"/>
           <p:cNvSpPr txBox="1"/>
           <p:nvPr/>
         </p:nvSpPr>
         <p:spPr>
           <a:xfrm>
-            <a:off x="685800" y="1417320"/>
-            <a:ext cx="10817352" cy="4892040"/>
+            <a:off x="685800" y="4480560"/>
+            <a:ext cx="8653881" cy="1280160"/>
           </a:xfrm>
           <a:prstGeom prst="rect">
             <a:avLst/>
@@ -9818,122 +10110,34 @@
           <a:noFill/>
         </p:spPr>
         <p:txBody>
-          <a:bodyPr wrap="square" anchor="ctr">
+          <a:bodyPr wrap="square">
             <a:spAutoFit/>
           </a:bodyPr>
           <a:lstStyle/>
           <a:p>
-            <a:pPr marL="190500" indent="-190500">
-              <a:spcBef>
-                <a:spcPts val="400"/>
-              </a:spcBef>
-              <a:spcAft>
-                <a:spcPts val="200"/>
-              </a:spcAft>
-            </a:pPr>
-            <a:r>
-              <a:rPr sz="1300">
-                <a:solidFill>
-                  <a:srgbClr val="3D5466"/>
+            <a:pPr algn="l"/>
+            <a:r>
+              <a:rPr sz="1600" b="0" i="0">
+                <a:solidFill>
+                  <a:srgbClr val="C8D2E6"/>
                 </a:solidFill>
                 <a:latin typeface="Arial"/>
               </a:rPr>
-              <a:t>▸  1: SBI-Feedback geben – schriftlich vorbereitet, persönlich ausgesprochen.</a:t>
-            </a:r>
-          </a:p>
-          <a:p>
-            <a:pPr marL="190500" indent="-190500">
-              <a:spcBef>
-                <a:spcPts val="400"/>
-              </a:spcBef>
-              <a:spcAft>
-                <a:spcPts val="200"/>
-              </a:spcAft>
-            </a:pPr>
-            <a:r>
-              <a:rPr sz="1300">
-                <a:solidFill>
-                  <a:srgbClr val="3D5466"/>
-                </a:solidFill>
-                <a:latin typeface="Arial"/>
-              </a:rPr>
-              <a:t>▸  2: Entwicklungsgespräch nach Fünf-Schritte führen – Stärken-SBI zuerst.</a:t>
-            </a:r>
-          </a:p>
-          <a:p>
-            <a:pPr marL="190500" indent="-190500">
-              <a:spcBef>
-                <a:spcPts val="400"/>
-              </a:spcBef>
-              <a:spcAft>
-                <a:spcPts val="200"/>
-              </a:spcAft>
-            </a:pPr>
-            <a:r>
-              <a:rPr sz="1300">
-                <a:solidFill>
-                  <a:srgbClr val="3D5466"/>
-                </a:solidFill>
-                <a:latin typeface="Arial"/>
-              </a:rPr>
-              <a:t>▸  3: Offene Nachfass-Situation klären – AB-2 vorher schriftlich ausfüllen.</a:t>
-            </a:r>
-          </a:p>
-        </p:txBody>
-      </p:sp>
-      <p:sp>
-        <p:nvSpPr>
-          <p:cNvPr id="9" name="Rectangle 8"/>
-          <p:cNvSpPr/>
-          <p:nvPr/>
-        </p:nvSpPr>
-        <p:spPr>
-          <a:xfrm>
-            <a:off x="0" y="6510528"/>
-            <a:ext cx="12188952" cy="347472"/>
-          </a:xfrm>
-          <a:prstGeom prst="rect">
-            <a:avLst/>
-          </a:prstGeom>
-          <a:solidFill>
-            <a:srgbClr val="0A1937"/>
-          </a:solidFill>
-          <a:ln>
-            <a:noFill/>
-          </a:ln>
-        </p:spPr>
-        <p:style>
-          <a:lnRef idx="1">
-            <a:schemeClr val="accent1"/>
-          </a:lnRef>
-          <a:fillRef idx="3">
-            <a:schemeClr val="accent1"/>
-          </a:fillRef>
-          <a:effectRef idx="2">
-            <a:schemeClr val="accent1"/>
-          </a:effectRef>
-          <a:fontRef idx="minor">
-            <a:schemeClr val="lt1"/>
-          </a:fontRef>
-        </p:style>
-        <p:txBody>
-          <a:bodyPr rtlCol="0" anchor="ctr"/>
-          <a:lstStyle/>
-          <a:p>
-            <a:pPr algn="ctr"/>
-          </a:p>
-        </p:txBody>
-      </p:sp>
-      <p:sp>
-        <p:nvSpPr>
-          <p:cNvPr id="10" name="TextBox 9"/>
+              <a:t>Drei Aufgaben für die Praxis – ein persönlicher Prüfstein – Brücke zu TL07</a:t>
+            </a:r>
+          </a:p>
+        </p:txBody>
+      </p:sp>
+      <p:sp>
+        <p:nvSpPr>
+          <p:cNvPr id="7" name="TextBox 6"/>
           <p:cNvSpPr txBox="1"/>
           <p:nvPr/>
         </p:nvSpPr>
         <p:spPr>
           <a:xfrm>
-            <a:off x="685800" y="6583680"/>
-            <a:ext cx="6490411" cy="256032"/>
+            <a:off x="685800" y="6355080"/>
+            <a:ext cx="10817352" cy="274320"/>
           </a:xfrm>
           <a:prstGeom prst="rect">
             <a:avLst/>
@@ -9950,7 +10154,7 @@
             <a:r>
               <a:rPr sz="700">
                 <a:solidFill>
-                  <a:srgbClr val="A0B4D2"/>
+                  <a:srgbClr val="8CA0C3"/>
                 </a:solidFill>
                 <a:latin typeface="Consolas"/>
               </a:rPr>
@@ -9968,6 +10172,424 @@
 </file>
 
 <file path=ppt/slides/slide23.xml><?xml version="1.0" encoding="utf-8"?>
+<p:sld xmlns:a="http://schemas.openxmlformats.org/drawingml/2006/main" xmlns:p="http://schemas.openxmlformats.org/presentationml/2006/main" xmlns:r="http://schemas.openxmlformats.org/officeDocument/2006/relationships">
+  <p:cSld>
+    <p:spTree>
+      <p:nvGrpSpPr>
+        <p:cNvPr id="1" name=""/>
+        <p:cNvGrpSpPr/>
+        <p:nvPr/>
+      </p:nvGrpSpPr>
+      <p:grpSpPr/>
+      <p:sp>
+        <p:nvSpPr>
+          <p:cNvPr id="2" name="Rectangle 1"/>
+          <p:cNvSpPr/>
+          <p:nvPr/>
+        </p:nvSpPr>
+        <p:spPr>
+          <a:xfrm>
+            <a:off x="0" y="0"/>
+            <a:ext cx="12188952" cy="6858000"/>
+          </a:xfrm>
+          <a:prstGeom prst="rect">
+            <a:avLst/>
+          </a:prstGeom>
+          <a:solidFill>
+            <a:srgbClr val="EDEDF3"/>
+          </a:solidFill>
+          <a:ln>
+            <a:noFill/>
+          </a:ln>
+        </p:spPr>
+        <p:style>
+          <a:lnRef idx="1">
+            <a:schemeClr val="accent1"/>
+          </a:lnRef>
+          <a:fillRef idx="3">
+            <a:schemeClr val="accent1"/>
+          </a:fillRef>
+          <a:effectRef idx="2">
+            <a:schemeClr val="accent1"/>
+          </a:effectRef>
+          <a:fontRef idx="minor">
+            <a:schemeClr val="lt1"/>
+          </a:fontRef>
+        </p:style>
+        <p:txBody>
+          <a:bodyPr rtlCol="0" anchor="ctr"/>
+          <a:lstStyle/>
+          <a:p>
+            <a:pPr algn="ctr"/>
+          </a:p>
+        </p:txBody>
+      </p:sp>
+      <p:sp>
+        <p:nvSpPr>
+          <p:cNvPr id="3" name="Rectangle 2"/>
+          <p:cNvSpPr/>
+          <p:nvPr/>
+        </p:nvSpPr>
+        <p:spPr>
+          <a:xfrm>
+            <a:off x="0" y="0"/>
+            <a:ext cx="12188952" cy="50292"/>
+          </a:xfrm>
+          <a:prstGeom prst="rect">
+            <a:avLst/>
+          </a:prstGeom>
+          <a:solidFill>
+            <a:srgbClr val="1F2C56"/>
+          </a:solidFill>
+          <a:ln>
+            <a:noFill/>
+          </a:ln>
+        </p:spPr>
+        <p:style>
+          <a:lnRef idx="1">
+            <a:schemeClr val="accent1"/>
+          </a:lnRef>
+          <a:fillRef idx="3">
+            <a:schemeClr val="accent1"/>
+          </a:fillRef>
+          <a:effectRef idx="2">
+            <a:schemeClr val="accent1"/>
+          </a:effectRef>
+          <a:fontRef idx="minor">
+            <a:schemeClr val="lt1"/>
+          </a:fontRef>
+        </p:style>
+        <p:txBody>
+          <a:bodyPr rtlCol="0" anchor="ctr"/>
+          <a:lstStyle/>
+          <a:p>
+            <a:pPr algn="ctr"/>
+          </a:p>
+        </p:txBody>
+      </p:sp>
+      <p:sp>
+        <p:nvSpPr>
+          <p:cNvPr id="4" name="TextBox 3"/>
+          <p:cNvSpPr txBox="1"/>
+          <p:nvPr/>
+        </p:nvSpPr>
+        <p:spPr>
+          <a:xfrm>
+            <a:off x="685800" y="109728"/>
+            <a:ext cx="10817352" cy="228600"/>
+          </a:xfrm>
+          <a:prstGeom prst="rect">
+            <a:avLst/>
+          </a:prstGeom>
+          <a:noFill/>
+        </p:spPr>
+        <p:txBody>
+          <a:bodyPr wrap="none">
+            <a:spAutoFit/>
+          </a:bodyPr>
+          <a:lstStyle/>
+          <a:p>
+            <a:pPr algn="l"/>
+            <a:r>
+              <a:rPr sz="750">
+                <a:solidFill>
+                  <a:srgbClr val="78808C"/>
+                </a:solidFill>
+                <a:latin typeface="Consolas"/>
+              </a:rPr>
+              <a:t>TL06  ·  INHALT</a:t>
+            </a:r>
+          </a:p>
+        </p:txBody>
+      </p:sp>
+      <p:sp>
+        <p:nvSpPr>
+          <p:cNvPr id="5" name="Rectangle 4"/>
+          <p:cNvSpPr/>
+          <p:nvPr/>
+        </p:nvSpPr>
+        <p:spPr>
+          <a:xfrm>
+            <a:off x="0" y="1234440"/>
+            <a:ext cx="12188952" cy="12700"/>
+          </a:xfrm>
+          <a:prstGeom prst="rect">
+            <a:avLst/>
+          </a:prstGeom>
+          <a:solidFill>
+            <a:srgbClr val="D8DFE4"/>
+          </a:solidFill>
+          <a:ln>
+            <a:noFill/>
+          </a:ln>
+        </p:spPr>
+        <p:style>
+          <a:lnRef idx="1">
+            <a:schemeClr val="accent1"/>
+          </a:lnRef>
+          <a:fillRef idx="3">
+            <a:schemeClr val="accent1"/>
+          </a:fillRef>
+          <a:effectRef idx="2">
+            <a:schemeClr val="accent1"/>
+          </a:effectRef>
+          <a:fontRef idx="minor">
+            <a:schemeClr val="lt1"/>
+          </a:fontRef>
+        </p:style>
+        <p:txBody>
+          <a:bodyPr rtlCol="0" anchor="ctr"/>
+          <a:lstStyle/>
+          <a:p>
+            <a:pPr algn="ctr"/>
+          </a:p>
+        </p:txBody>
+      </p:sp>
+      <p:sp>
+        <p:nvSpPr>
+          <p:cNvPr id="6" name="Rectangle 5"/>
+          <p:cNvSpPr/>
+          <p:nvPr/>
+        </p:nvSpPr>
+        <p:spPr>
+          <a:xfrm>
+            <a:off x="685800" y="502920"/>
+            <a:ext cx="36576" cy="658368"/>
+          </a:xfrm>
+          <a:prstGeom prst="rect">
+            <a:avLst/>
+          </a:prstGeom>
+          <a:solidFill>
+            <a:srgbClr val="D9C089"/>
+          </a:solidFill>
+          <a:ln>
+            <a:noFill/>
+          </a:ln>
+        </p:spPr>
+        <p:style>
+          <a:lnRef idx="1">
+            <a:schemeClr val="accent1"/>
+          </a:lnRef>
+          <a:fillRef idx="3">
+            <a:schemeClr val="accent1"/>
+          </a:fillRef>
+          <a:effectRef idx="2">
+            <a:schemeClr val="accent1"/>
+          </a:effectRef>
+          <a:fontRef idx="minor">
+            <a:schemeClr val="lt1"/>
+          </a:fontRef>
+        </p:style>
+        <p:txBody>
+          <a:bodyPr rtlCol="0" anchor="ctr"/>
+          <a:lstStyle/>
+          <a:p>
+            <a:pPr algn="ctr"/>
+          </a:p>
+        </p:txBody>
+      </p:sp>
+      <p:sp>
+        <p:nvSpPr>
+          <p:cNvPr id="7" name="TextBox 6"/>
+          <p:cNvSpPr txBox="1"/>
+          <p:nvPr/>
+        </p:nvSpPr>
+        <p:spPr>
+          <a:xfrm>
+            <a:off x="813816" y="502920"/>
+            <a:ext cx="10634472" cy="685800"/>
+          </a:xfrm>
+          <a:prstGeom prst="rect">
+            <a:avLst/>
+          </a:prstGeom>
+          <a:noFill/>
+        </p:spPr>
+        <p:txBody>
+          <a:bodyPr wrap="square">
+            <a:spAutoFit/>
+          </a:bodyPr>
+          <a:lstStyle/>
+          <a:p>
+            <a:pPr algn="l"/>
+            <a:r>
+              <a:rPr sz="2400" b="1" i="0">
+                <a:solidFill>
+                  <a:srgbClr val="1F2C56"/>
+                </a:solidFill>
+                <a:latin typeface="Arial"/>
+              </a:rPr>
+              <a:t>Drei Transferaufgaben für die nächsten zehn Tage</a:t>
+            </a:r>
+          </a:p>
+        </p:txBody>
+      </p:sp>
+      <p:sp>
+        <p:nvSpPr>
+          <p:cNvPr id="8" name="TextBox 7"/>
+          <p:cNvSpPr txBox="1"/>
+          <p:nvPr/>
+        </p:nvSpPr>
+        <p:spPr>
+          <a:xfrm>
+            <a:off x="685800" y="1417320"/>
+            <a:ext cx="10817352" cy="4892040"/>
+          </a:xfrm>
+          <a:prstGeom prst="rect">
+            <a:avLst/>
+          </a:prstGeom>
+          <a:noFill/>
+        </p:spPr>
+        <p:txBody>
+          <a:bodyPr wrap="square" anchor="ctr">
+            <a:spAutoFit/>
+          </a:bodyPr>
+          <a:lstStyle/>
+          <a:p>
+            <a:pPr marL="190500" indent="-190500">
+              <a:spcBef>
+                <a:spcPts val="400"/>
+              </a:spcBef>
+              <a:spcAft>
+                <a:spcPts val="200"/>
+              </a:spcAft>
+            </a:pPr>
+            <a:r>
+              <a:rPr sz="1300">
+                <a:solidFill>
+                  <a:srgbClr val="3D5466"/>
+                </a:solidFill>
+                <a:latin typeface="Arial"/>
+              </a:rPr>
+              <a:t>▸  1: SBI-Feedback geben – schriftlich vorbereitet, persönlich ausgesprochen.</a:t>
+            </a:r>
+          </a:p>
+          <a:p>
+            <a:pPr marL="190500" indent="-190500">
+              <a:spcBef>
+                <a:spcPts val="400"/>
+              </a:spcBef>
+              <a:spcAft>
+                <a:spcPts val="200"/>
+              </a:spcAft>
+            </a:pPr>
+            <a:r>
+              <a:rPr sz="1300">
+                <a:solidFill>
+                  <a:srgbClr val="3D5466"/>
+                </a:solidFill>
+                <a:latin typeface="Arial"/>
+              </a:rPr>
+              <a:t>▸  2: Entwicklungsgespräch nach Fünf-Schritte führen – Stärken-SBI zuerst.</a:t>
+            </a:r>
+          </a:p>
+          <a:p>
+            <a:pPr marL="190500" indent="-190500">
+              <a:spcBef>
+                <a:spcPts val="400"/>
+              </a:spcBef>
+              <a:spcAft>
+                <a:spcPts val="200"/>
+              </a:spcAft>
+            </a:pPr>
+            <a:r>
+              <a:rPr sz="1300">
+                <a:solidFill>
+                  <a:srgbClr val="3D5466"/>
+                </a:solidFill>
+                <a:latin typeface="Arial"/>
+              </a:rPr>
+              <a:t>▸  3: Offene Nachfass-Situation klären – AB-2 vorher schriftlich ausfüllen.</a:t>
+            </a:r>
+          </a:p>
+        </p:txBody>
+      </p:sp>
+      <p:sp>
+        <p:nvSpPr>
+          <p:cNvPr id="9" name="Rectangle 8"/>
+          <p:cNvSpPr/>
+          <p:nvPr/>
+        </p:nvSpPr>
+        <p:spPr>
+          <a:xfrm>
+            <a:off x="0" y="6510528"/>
+            <a:ext cx="12188952" cy="347472"/>
+          </a:xfrm>
+          <a:prstGeom prst="rect">
+            <a:avLst/>
+          </a:prstGeom>
+          <a:solidFill>
+            <a:srgbClr val="0A1937"/>
+          </a:solidFill>
+          <a:ln>
+            <a:noFill/>
+          </a:ln>
+        </p:spPr>
+        <p:style>
+          <a:lnRef idx="1">
+            <a:schemeClr val="accent1"/>
+          </a:lnRef>
+          <a:fillRef idx="3">
+            <a:schemeClr val="accent1"/>
+          </a:fillRef>
+          <a:effectRef idx="2">
+            <a:schemeClr val="accent1"/>
+          </a:effectRef>
+          <a:fontRef idx="minor">
+            <a:schemeClr val="lt1"/>
+          </a:fontRef>
+        </p:style>
+        <p:txBody>
+          <a:bodyPr rtlCol="0" anchor="ctr"/>
+          <a:lstStyle/>
+          <a:p>
+            <a:pPr algn="ctr"/>
+          </a:p>
+        </p:txBody>
+      </p:sp>
+      <p:sp>
+        <p:nvSpPr>
+          <p:cNvPr id="10" name="TextBox 9"/>
+          <p:cNvSpPr txBox="1"/>
+          <p:nvPr/>
+        </p:nvSpPr>
+        <p:spPr>
+          <a:xfrm>
+            <a:off x="685800" y="6583680"/>
+            <a:ext cx="6490411" cy="256032"/>
+          </a:xfrm>
+          <a:prstGeom prst="rect">
+            <a:avLst/>
+          </a:prstGeom>
+          <a:noFill/>
+        </p:spPr>
+        <p:txBody>
+          <a:bodyPr wrap="none">
+            <a:spAutoFit/>
+          </a:bodyPr>
+          <a:lstStyle/>
+          <a:p>
+            <a:pPr algn="l"/>
+            <a:r>
+              <a:rPr sz="700">
+                <a:solidFill>
+                  <a:srgbClr val="A0B4D2"/>
+                </a:solidFill>
+                <a:latin typeface="Consolas"/>
+              </a:rPr>
+              <a:t>FKB Campus  ·  TL06</a:t>
+            </a:r>
+          </a:p>
+        </p:txBody>
+      </p:sp>
+    </p:spTree>
+  </p:cSld>
+  <p:clrMapOvr>
+    <a:masterClrMapping/>
+  </p:clrMapOvr>
+</p:sld>
+</file>
+
+<file path=ppt/slides/slide24.xml><?xml version="1.0" encoding="utf-8"?>
 <p:sld xmlns:a="http://schemas.openxmlformats.org/drawingml/2006/main" xmlns:p="http://schemas.openxmlformats.org/presentationml/2006/main" xmlns:r="http://schemas.openxmlformats.org/officeDocument/2006/relationships">
   <p:cSld>
     <p:spTree>
